--- a/slides/presentation.pptx
+++ b/slides/presentation.pptx
@@ -20,6 +20,7 @@
     <p:sldId id="268" r:id="rId20"/>
     <p:sldId id="269" r:id="rId21"/>
     <p:sldId id="270" r:id="rId22"/>
+    <p:sldId id="271" r:id="rId23"/>
   </p:sldIdLst>
   <p:sldSz cx="12191695" cy="6858000" type="screen4x3"/>
   <p:notesSz cx="6858000" cy="9144000"/>
@@ -516,7 +517,7 @@
           <a:lstStyle/>
           <a:p>
             <a:r>
-              <a:t>Good morning everyone. We are Group [XX], and our project asks a very practical question: after a major earthquake, can a simple, transparent model tell inspectors which buildings to visit first? We worked with records of 260,601 buildings surveyed after the 2015 Gorkha earthquake in Nepal, and we deliberately limited ourselves to logistic regression so that every prediction can be explained. Over the next fifteen minutes, six of us will walk you through the data, our preprocessing, the two ideas we are most proud of, how we trained and tested the models, what we found, and where we would go next.</a:t>
+              <a:t>Good morning everyone. We are Group [XX], and our project asks a very practical question: after a major earthquake, can a simple, transparent model tell inspectors which buildings to visit first? We worked with records of 260,601 buildings surveyed after the 2015 Gorkha earthquake in Nepal, and we compared three models: a transparent logistic regression, a random forest and gradient boosting. Over the next fifteen minutes, six of us will walk you through the data, our preprocessing, the two ideas we are most proud of, how we trained and tested the models, what we found, and where we would go next.</a:t>
             </a:r>
           </a:p>
         </p:txBody>
@@ -586,7 +587,7 @@
           <a:lstStyle/>
           <a:p>
             <a:r>
-              <a:t>This chart shows cross-validated micro-F1 for every experiment, with error bars across the five folds. The majority baseline scores 0.569. Structure alone lifts this to 0.591, which is useful but modest. Adding the 31 regions gains +8.1 pp, and the target-encoded village levels add another +6.3 pp, the largest single step. Engineered features change micro-F1 by only +0.02 pp. The balanced and ordinal variants score 0.691 and 0.735. The fold-to-fold standard deviations are tiny, at most 0.19 percentage points, so the big steps are not noise. The orange bar marks the configuration we carried forward to tuning. Two lessons stand out. First, what a building is made of matters, but on its own it cannot tell a mud-stone house near the epicentre from one far away; location supplies that context. Second, once location is in, extra hand-made features add almost nothing, so in this problem better information beats cleverer transformations.</a:t>
+              <a:t>We start with model one. This chart shows cross-validated micro-F1 for every logistic-regression experiment, with error bars across the five folds. The majority baseline scores 0.569. Structure alone lifts this to 0.591, which is useful but modest. Adding the 31 regions gains +8.1 pp, and the target-encoded village levels add another +6.3 pp, the largest single step. Engineered features change micro-F1 by only +0.02 pp. The balanced and ordinal variants score 0.691 and 0.735. The fold-to-fold standard deviations are tiny, at most 0.19 percentage points, so the big steps are not noise. The lesson: building material matters, but only location tells a mud-stone house near the epicentre from one far away, and once location is in, hand-made features add almost nothing.</a:t>
             </a:r>
           </a:p>
         </p:txBody>
@@ -656,7 +657,7 @@
           <a:lstStyle/>
           <a:p>
             <a:r>
-              <a:t>Now the moment of truth: the holdout, used once. The tuned model scores a micro-F1 of 0.740 and a macro-F1 of 0.680. That is almost identical to the cross-validated estimate of 0.735, which tells us we did not overfit our model selection. The confusion matrix shows where the model succeeds and fails. Grade 2 is recalled 85% of the time and grade 3 63%. Grade 1 is the hardest, at 48%, because it is rare and often looks like grade 2. Importantly, mistakes are almost always between neighbouring grades: only 0.5% of destroyed buildings are mistaken for low damage, which is the costly error for inspectors. The largest error is grade-3 buildings predicted as grade 2, 36% of them. Many destroyed buildings look structurally ordinary on paper, and what tipped them over, such as local shaking, is not in the data. Precision tells the other side: when the model says grade 3, it is right 76% of the time.</a:t>
+              <a:t>Now the comparison our course asked for: three models on exactly the same features and folds. Logistic regression reaches 0.735 cross-validated micro-F1 and 0.740 on the holdout. The random forest reaches 0.744 and 0.750, and HistGradientBoosting 0.745 and 0.750. So HistGradientBoosting is our final model, chosen on cross-validation only. Its gain over logistic regression is +0.98 pp in cross-validation and +0.93 pp on the holdout: real and consistent, but small. The trees can combine features by themselves, for example a material that is only dangerous where shaking was strong. The two tree models are practically tied: on the holdout the random forest is even +0.05 pp ahead, but we fixed in advance that cross-validation decides, so the holdout stays an honest check. Macro-F1 tells a similar story: 0.673, 0.687 and 0.694 in cross-validation.</a:t>
             </a:r>
           </a:p>
         </p:txBody>
@@ -726,7 +727,7 @@
           <a:lstStyle/>
           <a:p>
             <a:r>
-              <a:t>This slide connects the model back to our problem statement. We ranked every holdout building by its predicted probability of grade 3, the near-destroyed class, and asked: if inspectors work down this list, how many destroyed buildings do they find? Inspecting the top 10 percent finds 28% of all grade-3 buildings; the top 20 percent finds 50%; the top 30 percent finds 66%. A random order would find only 10, 20 and 30 percent, so the ranking is 2.8 times better than random at the top of the list. Within the top 10 percent, 93% of buildings really are grade 3. To make this concrete: in our holdout of 52,121 buildings, the first 5,212 visits on the list would reach about 4,865 destroyed buildings, while a random order would reach about 1,744. In practice, that means the first teams sent out spend most of their time at the buildings that need them most. The curve also shows diminishing returns: after about half the list, most remaining buildings are lower risk, which is useful when planning how many teams to deploy.</a:t>
+              <a:t>Here is the final model, HistGradientBoosting, on the holdout. It scores a micro-F1 of 0.750 and a macro-F1 of 0.701, close to its cross-validated 0.745, so our model selection did not overfit. Grade 2 is recalled 85% of the time and grade 3 64%; grade 1 is hardest at 55%, because it is rare and often looks like grade 2. The grey numbers are logistic regression, for comparison. Importantly, mistakes are almost always between neighbouring grades: only 0.6% of destroyed buildings are mistaken for low damage, which is the costly error for inspectors.</a:t>
             </a:r>
           </a:p>
         </p:txBody>
@@ -796,7 +797,7 @@
           <a:lstStyle/>
           <a:p>
             <a:r>
-              <a:t>Because we used logistic regression, we can open the model and read it. This chart shows odds ratios for grade-3 damage; red bars raise the odds and blue bars lower them. The strongest risk factors are superstructure: mud mortar stone, age and superstructure: stone flag. The strongest protective factors are foundation type = i, roof type = x and superstructure: cement mortar brick. For materials, mud-mortar stone multiplies the odds of destruction by about 1.4, while cement-mortar brick multiplies them by 0.63 and engineered reinforced concrete by 0.84. In plain language, heavy, brittle construction such as stone held together with mud fails badly in strong shaking, while engineered reinforced concrete and cement-bonded walls hold together. This matches engineering intuition, which gives us confidence that the model learned real physics rather than quirks of the data. We left two things out of this chart: location features, which are the strongest predictors but describe how hard the ground shook rather than the building, and very rare flags, whose estimates are unreliable.</a:t>
+              <a:t>This slide connects the models back to our problem statement. We ranked every holdout building by its predicted probability of grade 3 and asked: if inspectors work down this list, how many destroyed buildings do they find? With the final model, the top 10 percent finds 28% of all grade-3 buildings, the top 20 percent 51%, and the top 30 percent 67%, against 10, 20 and 30 percent for a random order. The three curves almost overlap: at 20 percent, logistic regression finds 49.8%, the forest 50.6% and boosting 50.6%. Concretely, in our holdout the first 5,212 visits would reach about 4,914 destroyed buildings, instead of about 1,744 in random order.</a:t>
             </a:r>
           </a:p>
         </p:txBody>
@@ -866,7 +867,7 @@
           <a:lstStyle/>
           <a:p>
             <a:r>
-              <a:t>To summarise. Our final logistic regression reaches a holdout micro-F1 of 0.740, +17.2 pp above the majority baseline. Translated into the problem statement, inspecting just the top 20 percent of buildings on our list finds 50% of the destroyed ones. The single biggest technical contribution was leakage-safe target encoding of the village-level location. We were strict about methodology: every transformation is inside one pipeline, and the holdout was scored once. We ran seven controlled experiments and report the ones that did not help as honestly as the ones that did. And the whole project, from raw CSV to this deck, is reproducible with one command.</a:t>
+              <a:t>Why does a model call a building high-risk? On the left is logistic regression, which we can read directly: odds ratios for grade-3 damage, red raising and blue lowering the odds. The strongest risk factors are superstructure: mud mortar stone and age; the strongest protective ones are foundation type = i and roof type = x. Mud-mortar stone multiplies the odds of destruction by about 1.4, engineered reinforced concrete by 0.84. Tree ensembles have no coefficients, so on the right we use permutation importance: how much micro-F1 drops when we shuffle one input column. All three models rely first on location, then on construction details such as foundation, material and age, which matches our exploration and engineering intuition. The difference is that importance says how much a feature matters, while the odds ratios also say in which direction.</a:t>
             </a:r>
           </a:p>
         </p:txBody>
@@ -936,7 +937,77 @@
           <a:lstStyle/>
           <a:p>
             <a:r>
-              <a:t>Finally, where would we go next? The most valuable addition would be measured ground shaking, for example peak ground acceleration from USGS ShakeMap, instead of letting region ids act as a proxy. Second, interactions such as material by region would let the model learn that mud-stone is especially dangerous where shaking was strongest, while staying linear and interpretable. Third, a proportional-odds model with shared slopes might use the ordering better. Fourth, decision thresholds should come from inspection capacity, with calibrated probabilities. Lastly, a gradient-boosting benchmark would show how much accuracy we trade for transparency. Thank you for listening; we are happy to take questions.</a:t>
+              <a:t>To summarise. Our final model, HistGradientBoosting, reaches a holdout micro-F1 of 0.750, against 0.569 for always guessing grade 2. Translated into the problem statement, inspecting the top 20 percent of buildings on its list finds 51% of the destroyed ones. The biggest technical contribution was leakage-safe target encoding of village-level location, which helps every model. We compared three models fairly, and the trees beat logistic regression by +0.98 pp, so transparency costs a little accuracy but not much. We were strict about methodology: every transformation is inside one pipeline, so nothing is learned from validation data, and each tuned model saw the holdout exactly once. We also report the experiments that did not help, such as class weighting and the ordinal model, as honestly as the ones that did. Finally, the whole project, from the raw CSV files to the figures, the report and this deck, is reproducible with one command, and every number you have seen today is read automatically from a single results file.</a:t>
+            </a:r>
+          </a:p>
+        </p:txBody>
+      </p:sp>
+      <p:sp>
+        <p:nvSpPr>
+          <p:cNvPr id="4" name="Slide Number Placeholder 3"/>
+          <p:cNvSpPr>
+            <a:spLocks noGrp="1"/>
+          </p:cNvSpPr>
+          <p:nvPr>
+            <p:ph type="sldNum" idx="5" sz="quarter"/>
+          </p:nvPr>
+        </p:nvSpPr>
+        <p:spPr/>
+      </p:sp>
+    </p:spTree>
+  </p:cSld>
+  <p:clrMapOvr>
+    <a:masterClrMapping/>
+  </p:clrMapOvr>
+</p:notes>
+</file>
+
+<file path=ppt/notesSlides/notesSlide16.xml><?xml version="1.0" encoding="utf-8"?>
+<p:notes xmlns:a="http://schemas.openxmlformats.org/drawingml/2006/main" xmlns:p="http://schemas.openxmlformats.org/presentationml/2006/main" xmlns:r="http://schemas.openxmlformats.org/officeDocument/2006/relationships">
+  <p:cSld>
+    <p:spTree>
+      <p:nvGrpSpPr>
+        <p:cNvPr id="1" name=""/>
+        <p:cNvGrpSpPr/>
+        <p:nvPr/>
+      </p:nvGrpSpPr>
+      <p:grpSpPr>
+        <a:xfrm>
+          <a:off x="0" y="0"/>
+          <a:ext cx="0" cy="0"/>
+          <a:chOff x="0" y="0"/>
+          <a:chExt cx="0" cy="0"/>
+        </a:xfrm>
+      </p:grpSpPr>
+      <p:sp>
+        <p:nvSpPr>
+          <p:cNvPr id="2" name="Slide Image Placeholder 1"/>
+          <p:cNvSpPr>
+            <a:spLocks noGrp="1"/>
+          </p:cNvSpPr>
+          <p:nvPr>
+            <p:ph type="sldImg" idx="2"/>
+          </p:nvPr>
+        </p:nvSpPr>
+        <p:spPr/>
+      </p:sp>
+      <p:sp>
+        <p:nvSpPr>
+          <p:cNvPr id="3" name="Notes Placeholder 2"/>
+          <p:cNvSpPr>
+            <a:spLocks noGrp="1"/>
+          </p:cNvSpPr>
+          <p:nvPr>
+            <p:ph type="body" idx="3" sz="quarter"/>
+          </p:nvPr>
+        </p:nvSpPr>
+        <p:spPr/>
+        <p:txBody>
+          <a:bodyPr/>
+          <a:lstStyle/>
+          <a:p>
+            <a:r>
+              <a:t>Finally, where would we go next? The most valuable addition would be measured ground shaking, for example peak ground acceleration from USGS ShakeMap, instead of letting region ids act as a proxy. Second, interaction terms such as material by region could close the gap between logistic regression and the trees while staying interpretable. Third, SHAP values would give the tree models per-building explanations, so the more accurate model could also tell an inspector why a building is flagged. A wider search, or libraries such as LightGBM or CatBoost, might add a little more accuracy. Fourth, decision thresholds should come from inspection capacity and from the cost of missing a destroyed building, and the probabilities should be calibrated so teams can trust the percentages. Lastly, before deploying a triage tool, we would test the model with spatially grouped cross-validation, to see how it performs in areas it has never seen. Thank you for listening; we are happy to take questions.</a:t>
             </a:r>
           </a:p>
         </p:txBody>
@@ -1076,7 +1147,7 @@
           <a:lstStyle/>
           <a:p>
             <a:r>
-              <a:t>Here is our problem statement. After an earthquake, inspection teams are scarce and there are hundreds of thousands of buildings. If a model can estimate how badly each building was damaged from information that is already on record, its structure and its location, teams can visit the most dangerous buildings first. Technically this is a three-class classification problem, and the classes are ordered, grade 1 to grade 3. We report micro-F1, which is the competition metric and equals accuracy, and macro-F1, which gives the rare low-damage class equal weight. Because the real goal is prioritisation, we also rank buildings by their predicted probability of grade 3 and measure how many destroyed buildings an inspection list catches. Finally, we restricted ourselves to logistic regression, a model that is transparent and easy to audit.</a:t>
+              <a:t>Here is our problem statement. After an earthquake, inspection teams are scarce and there are hundreds of thousands of buildings. If a model can estimate how badly each building was damaged from information that is already on record, its structure and its location, teams can visit the most dangerous buildings first. Technically this is a three-class classification problem, and the classes are ordered, grade 1 to grade 3. We report micro-F1, which is the competition metric and equals accuracy, and macro-F1, which gives the rare low-damage class equal weight. Because the real goal is prioritisation, we also rank buildings by their predicted probability of grade 3 and measure how many destroyed buildings an inspection list catches. Finally, we compare three models: logistic regression, which is transparent and easy to audit, and two tree ensembles, which are more flexible but harder to explain.</a:t>
             </a:r>
           </a:p>
         </p:txBody>
@@ -1286,7 +1357,7 @@
           <a:lstStyle/>
           <a:p>
             <a:r>
-              <a:t>Every preprocessing step lives inside a single scikit-learn pipeline, so in cross-validation each step is re-fitted on the training folds only. That is how we avoid data leakage. The data had no missing values, but 1,390 buildings have an age of 995 years, which is clearly a placeholder. Instead of treating them as very old buildings, we add a flag and replace the age with the training median; the flag matters because these buildings are actually damaged less often. Age, area and height are right-skewed, so we log-transform and standardise them. Categorical columns and the top region level are one-hot encoded, and the two fine location levels are target-encoded, which we'll explain next. For feature engineering we tested four candidates, each added on its own and compared fold by fold. We kept only features that improved the mean and won in at least four of five folds: floors_x_log_age. Overall, engineered features changed micro-F1 by +0.02 pp, which is small. Most of the signal is already in the raw features.</a:t>
+              <a:t>Every preprocessing step lives inside a single scikit-learn pipeline, so in cross-validation each step is re-fitted on the training folds only. That is how we avoid data leakage. The data had no missing values, but 1,390 buildings have an age of 995 years, which is clearly a placeholder. Instead of treating them as very old buildings, we add a flag and replace the age with the training median; the flag matters because these buildings are actually damaged less often. For logistic regression, age, area and height are log-transformed and standardised, and categoricals are one-hot encoded; the tree models skip the scaling and use integer codes instead. The two fine location levels are target-encoded for all three models, which we'll explain next. For feature engineering we tested four candidates, each added on its own and compared fold by fold. We kept only features that improved the mean and won in at least four of five folds: floors_x_log_age. Overall, engineered features changed micro-F1 by +0.02 pp, which is small. Most of the signal is already in the raw features.</a:t>
             </a:r>
           </a:p>
         </p:txBody>
@@ -1496,7 +1567,7 @@
           <a:lstStyle/>
           <a:p>
             <a:r>
-              <a:t>Now, how we trained and tested. We first split the labelled data 80 to 20, stratified by damage grade. The 20 percent holdout, 52,121 buildings, was locked away and used exactly once at the very end. Everything else, comparing experiments and tuning, used stratified five-fold cross-validation on the 80 percent. Because every preprocessing step lives in the pipeline, encoders and scalers are re-fitted inside each fold, so no fold ever sees statistics from its validation data. We ran seven experiments, each adding one idea: a majority baseline, structure only, plus region, plus target-encoded villages, plus engineered features, then a class-balanced and an ordinal variant. The best of the last three, E4, was tuned with GridSearchCV over C from 0.01 to 100, and the best C was 0.3. We checked convergence for every single fit. Finally, after the holdout evaluation, the model was refit on all labelled data to produce our competition submission.</a:t>
+              <a:t>Now, how we trained and tested. We split the labelled data 80 to 20, stratified by damage grade, and locked the 52,121-building holdout away until the very end. All comparisons and tuning used stratified five-fold cross-validation on the 80 percent, with every encoder re-fitted inside each fold. For logistic regression we ran seven experiments and tuned C on the best one, E4. The random forest and gradient boosting reuse the same features and folds, with small tuning grids. Each tuned model was scored once on the holdout, but the final model was chosen by cross-validation alone: HistGradientBoosting. It was then refit on all labelled data for our submission.</a:t>
             </a:r>
           </a:p>
         </p:txBody>
@@ -4713,7 +4784,7 @@
                 </a:solidFill>
                 <a:latin typeface="Calibri"/>
               </a:rPr>
-              <a:t>Logistic regression on 260,601 buildings from the 2015 Gorkha earthquake, Nepal</a:t>
+              <a:t>Logistic regression, random forest and gradient boosting on 260,601 buildings from the 2015 Gorkha earthquake, Nepal</a:t>
             </a:r>
           </a:p>
         </p:txBody>
@@ -4821,7 +4892,7 @@
                 </a:solidFill>
                 <a:latin typeface="Calibri"/>
               </a:rPr>
-              <a:t>Group [XX]  ·  Earthquake damage prediction with logistic regression</a:t>
+              <a:t>Group [XX]  ·  Earthquake damage prediction: logistic regression, random forest, gradient boosting</a:t>
             </a:r>
           </a:p>
         </p:txBody>
@@ -4917,7 +4988,7 @@
                 </a:solidFill>
                 <a:latin typeface="Calibri"/>
               </a:rPr>
-              <a:t>EXPERIMENTAL STUDY AND ANALYSIS</a:t>
+              <a:t>EXPERIMENTAL STUDY · MODEL 1: LOGISTIC REGRESSION</a:t>
             </a:r>
           </a:p>
         </p:txBody>
@@ -5159,7 +5230,7 @@
                 </a:solidFill>
                 <a:latin typeface="Calibri"/>
               </a:rPr>
-              <a:t>Group [XX]  ·  Earthquake damage prediction with logistic regression</a:t>
+              <a:t>Group [XX]  ·  Earthquake damage prediction: logistic regression, random forest, gradient boosting</a:t>
             </a:r>
           </a:p>
         </p:txBody>
@@ -5255,7 +5326,7 @@
                 </a:solidFill>
                 <a:latin typeface="Calibri"/>
               </a:rPr>
-              <a:t>EXPERIMENTAL STUDY AND ANALYSIS</a:t>
+              <a:t>EXPERIMENTAL STUDY · THREE MODELS</a:t>
             </a:r>
           </a:p>
         </p:txBody>
@@ -5290,226 +5361,14 @@
                 </a:solidFill>
                 <a:latin typeface="Cambria"/>
               </a:rPr>
-              <a:t>Holdout performance of the tuned model</a:t>
-            </a:r>
-          </a:p>
-        </p:txBody>
-      </p:sp>
-      <p:sp>
-        <p:nvSpPr>
-          <p:cNvPr id="4" name="TextBox 3"/>
-          <p:cNvSpPr txBox="1"/>
-          <p:nvPr/>
-        </p:nvSpPr>
-        <p:spPr>
-          <a:xfrm>
-            <a:off x="548640" y="1600200"/>
-            <a:ext cx="3017520" cy="685800"/>
-          </a:xfrm>
-          <a:prstGeom prst="rect">
-            <a:avLst/>
-          </a:prstGeom>
-          <a:noFill/>
-        </p:spPr>
-        <p:txBody>
-          <a:bodyPr wrap="square" lIns="0" rIns="0" tIns="0" bIns="0" anchor="t">
-            <a:spAutoFit/>
-          </a:bodyPr>
-          <a:lstStyle/>
-          <a:p>
-            <a:pPr algn="l"/>
-            <a:r>
-              <a:rPr sz="4800" b="1" i="0">
-                <a:solidFill>
-                  <a:srgbClr val="EB6834"/>
-                </a:solidFill>
-                <a:latin typeface="Cambria"/>
-              </a:rPr>
-              <a:t>0.740</a:t>
-            </a:r>
-          </a:p>
-        </p:txBody>
-      </p:sp>
-      <p:sp>
-        <p:nvSpPr>
-          <p:cNvPr id="5" name="TextBox 4"/>
-          <p:cNvSpPr txBox="1"/>
-          <p:nvPr/>
-        </p:nvSpPr>
-        <p:spPr>
-          <a:xfrm>
-            <a:off x="548640" y="2331720"/>
-            <a:ext cx="3017520" cy="640080"/>
-          </a:xfrm>
-          <a:prstGeom prst="rect">
-            <a:avLst/>
-          </a:prstGeom>
-          <a:noFill/>
-        </p:spPr>
-        <p:txBody>
-          <a:bodyPr wrap="square" lIns="0" rIns="0" tIns="0" bIns="0" anchor="t">
-            <a:spAutoFit/>
-          </a:bodyPr>
-          <a:lstStyle/>
-          <a:p>
-            <a:pPr algn="l"/>
-            <a:r>
-              <a:rPr sz="1400" b="0" i="0">
-                <a:solidFill>
-                  <a:srgbClr val="52514E"/>
-                </a:solidFill>
-                <a:latin typeface="Calibri"/>
-              </a:rPr>
-              <a:t>holdout micro-F1
-(competition metric)</a:t>
-            </a:r>
-          </a:p>
-        </p:txBody>
-      </p:sp>
-      <p:sp>
-        <p:nvSpPr>
-          <p:cNvPr id="6" name="TextBox 5"/>
-          <p:cNvSpPr txBox="1"/>
-          <p:nvPr/>
-        </p:nvSpPr>
-        <p:spPr>
-          <a:xfrm>
-            <a:off x="548640" y="3108960"/>
-            <a:ext cx="3017520" cy="685800"/>
-          </a:xfrm>
-          <a:prstGeom prst="rect">
-            <a:avLst/>
-          </a:prstGeom>
-          <a:noFill/>
-        </p:spPr>
-        <p:txBody>
-          <a:bodyPr wrap="square" lIns="0" rIns="0" tIns="0" bIns="0" anchor="t">
-            <a:spAutoFit/>
-          </a:bodyPr>
-          <a:lstStyle/>
-          <a:p>
-            <a:pPr algn="l"/>
-            <a:r>
-              <a:rPr sz="4000" b="1" i="0">
-                <a:solidFill>
-                  <a:srgbClr val="142340"/>
-                </a:solidFill>
-                <a:latin typeface="Cambria"/>
-              </a:rPr>
-              <a:t>0.680</a:t>
-            </a:r>
-          </a:p>
-        </p:txBody>
-      </p:sp>
-      <p:sp>
-        <p:nvSpPr>
-          <p:cNvPr id="7" name="TextBox 6"/>
-          <p:cNvSpPr txBox="1"/>
-          <p:nvPr/>
-        </p:nvSpPr>
-        <p:spPr>
-          <a:xfrm>
-            <a:off x="548640" y="3840480"/>
-            <a:ext cx="3017520" cy="640080"/>
-          </a:xfrm>
-          <a:prstGeom prst="rect">
-            <a:avLst/>
-          </a:prstGeom>
-          <a:noFill/>
-        </p:spPr>
-        <p:txBody>
-          <a:bodyPr wrap="square" lIns="0" rIns="0" tIns="0" bIns="0" anchor="t">
-            <a:spAutoFit/>
-          </a:bodyPr>
-          <a:lstStyle/>
-          <a:p>
-            <a:pPr algn="l"/>
-            <a:r>
-              <a:rPr sz="1400" b="0" i="0">
-                <a:solidFill>
-                  <a:srgbClr val="52514E"/>
-                </a:solidFill>
-                <a:latin typeface="Calibri"/>
-              </a:rPr>
-              <a:t>holdout macro-F1</a:t>
-            </a:r>
-          </a:p>
-        </p:txBody>
-      </p:sp>
-      <p:sp>
-        <p:nvSpPr>
-          <p:cNvPr id="8" name="TextBox 7"/>
-          <p:cNvSpPr txBox="1"/>
-          <p:nvPr/>
-        </p:nvSpPr>
-        <p:spPr>
-          <a:xfrm>
-            <a:off x="548640" y="4434840"/>
-            <a:ext cx="3017520" cy="685800"/>
-          </a:xfrm>
-          <a:prstGeom prst="rect">
-            <a:avLst/>
-          </a:prstGeom>
-          <a:noFill/>
-        </p:spPr>
-        <p:txBody>
-          <a:bodyPr wrap="square" lIns="0" rIns="0" tIns="0" bIns="0" anchor="t">
-            <a:spAutoFit/>
-          </a:bodyPr>
-          <a:lstStyle/>
-          <a:p>
-            <a:pPr algn="l"/>
-            <a:r>
-              <a:rPr sz="3200" b="1" i="0">
-                <a:solidFill>
-                  <a:srgbClr val="142340"/>
-                </a:solidFill>
-                <a:latin typeface="Cambria"/>
-              </a:rPr>
-              <a:t>0.735</a:t>
-            </a:r>
-          </a:p>
-        </p:txBody>
-      </p:sp>
-      <p:sp>
-        <p:nvSpPr>
-          <p:cNvPr id="9" name="TextBox 8"/>
-          <p:cNvSpPr txBox="1"/>
-          <p:nvPr/>
-        </p:nvSpPr>
-        <p:spPr>
-          <a:xfrm>
-            <a:off x="548640" y="5166359"/>
-            <a:ext cx="3017520" cy="640080"/>
-          </a:xfrm>
-          <a:prstGeom prst="rect">
-            <a:avLst/>
-          </a:prstGeom>
-          <a:noFill/>
-        </p:spPr>
-        <p:txBody>
-          <a:bodyPr wrap="square" lIns="0" rIns="0" tIns="0" bIns="0" anchor="t">
-            <a:spAutoFit/>
-          </a:bodyPr>
-          <a:lstStyle/>
-          <a:p>
-            <a:pPr algn="l"/>
-            <a:r>
-              <a:rPr sz="1400" b="0" i="0">
-                <a:solidFill>
-                  <a:srgbClr val="52514E"/>
-                </a:solidFill>
-                <a:latin typeface="Calibri"/>
-              </a:rPr>
-              <a:t>CV micro-F1 at C = 0.3
-(holdout agrees with CV)</a:t>
+              <a:t>HistGradientBoosting wins on cross-validation</a:t>
             </a:r>
           </a:p>
         </p:txBody>
       </p:sp>
       <p:pic>
         <p:nvPicPr>
-          <p:cNvPr id="10" name="Picture 9" descr="fig09_confusion_matrix.png"/>
+          <p:cNvPr id="4" name="Picture 3" descr="fig13_model_comparison.png"/>
           <p:cNvPicPr>
             <a:picLocks noChangeAspect="1"/>
           </p:cNvPicPr>
@@ -5523,8 +5382,8 @@
         </p:blipFill>
         <p:spPr>
           <a:xfrm>
-            <a:off x="3566160" y="2016280"/>
-            <a:ext cx="4754880" cy="3648398"/>
+            <a:off x="411480" y="1800828"/>
+            <a:ext cx="7223759" cy="3713542"/>
           </a:xfrm>
           <a:prstGeom prst="rect">
             <a:avLst/>
@@ -5533,49 +5392,14 @@
       </p:pic>
       <p:sp>
         <p:nvSpPr>
-          <p:cNvPr id="11" name="TextBox 10"/>
-          <p:cNvSpPr txBox="1"/>
-          <p:nvPr/>
-        </p:nvSpPr>
-        <p:spPr>
-          <a:xfrm>
-            <a:off x="8595360" y="1600200"/>
-            <a:ext cx="3108960" cy="365760"/>
-          </a:xfrm>
-          <a:prstGeom prst="rect">
-            <a:avLst/>
-          </a:prstGeom>
-          <a:noFill/>
-        </p:spPr>
-        <p:txBody>
-          <a:bodyPr wrap="square" lIns="0" rIns="0" tIns="0" bIns="0" anchor="t">
-            <a:spAutoFit/>
-          </a:bodyPr>
-          <a:lstStyle/>
-          <a:p>
-            <a:pPr algn="l"/>
-            <a:r>
-              <a:rPr sz="1700" b="1" i="0">
-                <a:solidFill>
-                  <a:srgbClr val="142340"/>
-                </a:solidFill>
-                <a:latin typeface="Calibri"/>
-              </a:rPr>
-              <a:t>Per-class recall</a:t>
-            </a:r>
-          </a:p>
-        </p:txBody>
-      </p:sp>
-      <p:sp>
-        <p:nvSpPr>
-          <p:cNvPr id="12" name="Rounded Rectangle 11"/>
+          <p:cNvPr id="5" name="Rounded Rectangle 4"/>
           <p:cNvSpPr/>
           <p:nvPr/>
         </p:nvSpPr>
         <p:spPr>
           <a:xfrm>
-            <a:off x="8595360" y="2103120"/>
-            <a:ext cx="3063240" cy="822960"/>
+            <a:off x="7863840" y="1463040"/>
+            <a:ext cx="3794760" cy="1325880"/>
           </a:xfrm>
           <a:prstGeom prst="roundRect">
             <a:avLst>
@@ -5614,22 +5438,22 @@
       </p:sp>
       <p:sp>
         <p:nvSpPr>
-          <p:cNvPr id="13" name="TextBox 12"/>
-          <p:cNvSpPr txBox="1"/>
-          <p:nvPr/>
-        </p:nvSpPr>
-        <p:spPr>
-          <a:xfrm>
-            <a:off x="8778240" y="2212848"/>
-            <a:ext cx="1463040" cy="640080"/>
-          </a:xfrm>
-          <a:prstGeom prst="rect">
-            <a:avLst/>
-          </a:prstGeom>
-          <a:noFill/>
-        </p:spPr>
-        <p:txBody>
-          <a:bodyPr wrap="square" lIns="0" rIns="0" tIns="0" bIns="0" anchor="ctr">
+          <p:cNvPr id="6" name="TextBox 5"/>
+          <p:cNvSpPr txBox="1"/>
+          <p:nvPr/>
+        </p:nvSpPr>
+        <p:spPr>
+          <a:xfrm>
+            <a:off x="8046720" y="1554480"/>
+            <a:ext cx="3474720" cy="320040"/>
+          </a:xfrm>
+          <a:prstGeom prst="rect">
+            <a:avLst/>
+          </a:prstGeom>
+          <a:noFill/>
+        </p:spPr>
+        <p:txBody>
+          <a:bodyPr wrap="square" lIns="0" rIns="0" tIns="0" bIns="0" anchor="t">
             <a:spAutoFit/>
           </a:bodyPr>
           <a:lstStyle/>
@@ -5642,56 +5466,112 @@
                 </a:solidFill>
                 <a:latin typeface="Calibri"/>
               </a:rPr>
-              <a:t>Grade 1</a:t>
-            </a:r>
-          </a:p>
-        </p:txBody>
-      </p:sp>
-      <p:sp>
-        <p:nvSpPr>
-          <p:cNvPr id="14" name="TextBox 13"/>
-          <p:cNvSpPr txBox="1"/>
-          <p:nvPr/>
-        </p:nvSpPr>
-        <p:spPr>
-          <a:xfrm>
-            <a:off x="10149840" y="2176272"/>
-            <a:ext cx="1371600" cy="685800"/>
-          </a:xfrm>
-          <a:prstGeom prst="rect">
-            <a:avLst/>
-          </a:prstGeom>
-          <a:noFill/>
-        </p:spPr>
-        <p:txBody>
-          <a:bodyPr wrap="square" lIns="0" rIns="0" tIns="0" bIns="0" anchor="ctr">
-            <a:spAutoFit/>
-          </a:bodyPr>
-          <a:lstStyle/>
-          <a:p>
-            <a:pPr algn="r"/>
-            <a:r>
-              <a:rPr sz="2600" b="1" i="0">
-                <a:solidFill>
-                  <a:srgbClr val="142340"/>
-                </a:solidFill>
-                <a:latin typeface="Cambria"/>
-              </a:rPr>
-              <a:t>0.48</a:t>
-            </a:r>
-          </a:p>
-        </p:txBody>
-      </p:sp>
-      <p:sp>
-        <p:nvSpPr>
-          <p:cNvPr id="15" name="Rounded Rectangle 14"/>
+              <a:t>Logistic regression</a:t>
+            </a:r>
+          </a:p>
+        </p:txBody>
+      </p:sp>
+      <p:sp>
+        <p:nvSpPr>
+          <p:cNvPr id="7" name="TextBox 6"/>
+          <p:cNvSpPr txBox="1"/>
+          <p:nvPr/>
+        </p:nvSpPr>
+        <p:spPr>
+          <a:xfrm>
+            <a:off x="8046720" y="1901952"/>
+            <a:ext cx="3474720" cy="868680"/>
+          </a:xfrm>
+          <a:prstGeom prst="rect">
+            <a:avLst/>
+          </a:prstGeom>
+          <a:noFill/>
+        </p:spPr>
+        <p:txBody>
+          <a:bodyPr wrap="square" lIns="0" rIns="0" tIns="0" bIns="0" anchor="t">
+            <a:spAutoFit/>
+          </a:bodyPr>
+          <a:lstStyle/>
+          <a:p>
+            <a:pPr algn="l">
+              <a:spcAft>
+                <a:spcPts val="200"/>
+              </a:spcAft>
+            </a:pPr>
+            <a:r>
+              <a:rPr sz="1250" b="0" i="0">
+                <a:solidFill>
+                  <a:srgbClr val="52514E"/>
+                </a:solidFill>
+                <a:latin typeface="Calibri"/>
+              </a:rPr>
+              <a:t>CV </a:t>
+            </a:r>
+            <a:r>
+              <a:rPr sz="1250" b="1" i="0">
+                <a:solidFill>
+                  <a:srgbClr val="EB6834"/>
+                </a:solidFill>
+                <a:latin typeface="Calibri"/>
+              </a:rPr>
+              <a:t>0.735</a:t>
+            </a:r>
+            <a:r>
+              <a:rPr sz="1250" b="0" i="0">
+                <a:solidFill>
+                  <a:srgbClr val="52514E"/>
+                </a:solidFill>
+                <a:latin typeface="Calibri"/>
+              </a:rPr>
+              <a:t>   holdout </a:t>
+            </a:r>
+            <a:r>
+              <a:rPr sz="1250" b="1" i="0">
+                <a:solidFill>
+                  <a:srgbClr val="EB6834"/>
+                </a:solidFill>
+                <a:latin typeface="Calibri"/>
+              </a:rPr>
+              <a:t>0.740</a:t>
+            </a:r>
+            <a:r>
+              <a:rPr sz="1250" b="0" i="0">
+                <a:solidFill>
+                  <a:srgbClr val="52514E"/>
+                </a:solidFill>
+                <a:latin typeface="Calibri"/>
+              </a:rPr>
+              <a:t>  micro-F1</a:t>
+            </a:r>
+          </a:p>
+          <a:p>
+            <a:pPr algn="l">
+              <a:spcAft>
+                <a:spcPts val="200"/>
+              </a:spcAft>
+            </a:pPr>
+            <a:r>
+              <a:rPr sz="1250" b="0" i="0">
+                <a:solidFill>
+                  <a:srgbClr val="52514E"/>
+                </a:solidFill>
+                <a:latin typeface="Calibri"/>
+              </a:rPr>
+              <a:t>C = 0.3</a:t>
+            </a:r>
+          </a:p>
+        </p:txBody>
+      </p:sp>
+      <p:sp>
+        <p:nvSpPr>
+          <p:cNvPr id="8" name="Rounded Rectangle 7"/>
           <p:cNvSpPr/>
           <p:nvPr/>
         </p:nvSpPr>
         <p:spPr>
           <a:xfrm>
-            <a:off x="8595360" y="3063239"/>
-            <a:ext cx="3063240" cy="822960"/>
+            <a:off x="7863840" y="2944368"/>
+            <a:ext cx="3794760" cy="1325880"/>
           </a:xfrm>
           <a:prstGeom prst="roundRect">
             <a:avLst>
@@ -5730,22 +5610,22 @@
       </p:sp>
       <p:sp>
         <p:nvSpPr>
-          <p:cNvPr id="16" name="TextBox 15"/>
-          <p:cNvSpPr txBox="1"/>
-          <p:nvPr/>
-        </p:nvSpPr>
-        <p:spPr>
-          <a:xfrm>
-            <a:off x="8778240" y="3172968"/>
-            <a:ext cx="1463040" cy="640080"/>
-          </a:xfrm>
-          <a:prstGeom prst="rect">
-            <a:avLst/>
-          </a:prstGeom>
-          <a:noFill/>
-        </p:spPr>
-        <p:txBody>
-          <a:bodyPr wrap="square" lIns="0" rIns="0" tIns="0" bIns="0" anchor="ctr">
+          <p:cNvPr id="9" name="TextBox 8"/>
+          <p:cNvSpPr txBox="1"/>
+          <p:nvPr/>
+        </p:nvSpPr>
+        <p:spPr>
+          <a:xfrm>
+            <a:off x="8046720" y="3035808"/>
+            <a:ext cx="3474720" cy="320040"/>
+          </a:xfrm>
+          <a:prstGeom prst="rect">
+            <a:avLst/>
+          </a:prstGeom>
+          <a:noFill/>
+        </p:spPr>
+        <p:txBody>
+          <a:bodyPr wrap="square" lIns="0" rIns="0" tIns="0" bIns="0" anchor="t">
             <a:spAutoFit/>
           </a:bodyPr>
           <a:lstStyle/>
@@ -5758,56 +5638,112 @@
                 </a:solidFill>
                 <a:latin typeface="Calibri"/>
               </a:rPr>
-              <a:t>Grade 2</a:t>
-            </a:r>
-          </a:p>
-        </p:txBody>
-      </p:sp>
-      <p:sp>
-        <p:nvSpPr>
-          <p:cNvPr id="17" name="TextBox 16"/>
-          <p:cNvSpPr txBox="1"/>
-          <p:nvPr/>
-        </p:nvSpPr>
-        <p:spPr>
-          <a:xfrm>
-            <a:off x="10149840" y="3136391"/>
-            <a:ext cx="1371600" cy="685800"/>
-          </a:xfrm>
-          <a:prstGeom prst="rect">
-            <a:avLst/>
-          </a:prstGeom>
-          <a:noFill/>
-        </p:spPr>
-        <p:txBody>
-          <a:bodyPr wrap="square" lIns="0" rIns="0" tIns="0" bIns="0" anchor="ctr">
-            <a:spAutoFit/>
-          </a:bodyPr>
-          <a:lstStyle/>
-          <a:p>
-            <a:pPr algn="r"/>
-            <a:r>
-              <a:rPr sz="2600" b="1" i="0">
-                <a:solidFill>
-                  <a:srgbClr val="142340"/>
-                </a:solidFill>
-                <a:latin typeface="Cambria"/>
-              </a:rPr>
-              <a:t>0.85</a:t>
-            </a:r>
-          </a:p>
-        </p:txBody>
-      </p:sp>
-      <p:sp>
-        <p:nvSpPr>
-          <p:cNvPr id="18" name="Rounded Rectangle 17"/>
+              <a:t>Random forest</a:t>
+            </a:r>
+          </a:p>
+        </p:txBody>
+      </p:sp>
+      <p:sp>
+        <p:nvSpPr>
+          <p:cNvPr id="10" name="TextBox 9"/>
+          <p:cNvSpPr txBox="1"/>
+          <p:nvPr/>
+        </p:nvSpPr>
+        <p:spPr>
+          <a:xfrm>
+            <a:off x="8046720" y="3383280"/>
+            <a:ext cx="3474720" cy="868680"/>
+          </a:xfrm>
+          <a:prstGeom prst="rect">
+            <a:avLst/>
+          </a:prstGeom>
+          <a:noFill/>
+        </p:spPr>
+        <p:txBody>
+          <a:bodyPr wrap="square" lIns="0" rIns="0" tIns="0" bIns="0" anchor="t">
+            <a:spAutoFit/>
+          </a:bodyPr>
+          <a:lstStyle/>
+          <a:p>
+            <a:pPr algn="l">
+              <a:spcAft>
+                <a:spcPts val="200"/>
+              </a:spcAft>
+            </a:pPr>
+            <a:r>
+              <a:rPr sz="1250" b="0" i="0">
+                <a:solidFill>
+                  <a:srgbClr val="52514E"/>
+                </a:solidFill>
+                <a:latin typeface="Calibri"/>
+              </a:rPr>
+              <a:t>CV </a:t>
+            </a:r>
+            <a:r>
+              <a:rPr sz="1250" b="1" i="0">
+                <a:solidFill>
+                  <a:srgbClr val="EB6834"/>
+                </a:solidFill>
+                <a:latin typeface="Calibri"/>
+              </a:rPr>
+              <a:t>0.744</a:t>
+            </a:r>
+            <a:r>
+              <a:rPr sz="1250" b="0" i="0">
+                <a:solidFill>
+                  <a:srgbClr val="52514E"/>
+                </a:solidFill>
+                <a:latin typeface="Calibri"/>
+              </a:rPr>
+              <a:t>   holdout </a:t>
+            </a:r>
+            <a:r>
+              <a:rPr sz="1250" b="1" i="0">
+                <a:solidFill>
+                  <a:srgbClr val="EB6834"/>
+                </a:solidFill>
+                <a:latin typeface="Calibri"/>
+              </a:rPr>
+              <a:t>0.750</a:t>
+            </a:r>
+            <a:r>
+              <a:rPr sz="1250" b="0" i="0">
+                <a:solidFill>
+                  <a:srgbClr val="52514E"/>
+                </a:solidFill>
+                <a:latin typeface="Calibri"/>
+              </a:rPr>
+              <a:t>  micro-F1</a:t>
+            </a:r>
+          </a:p>
+          <a:p>
+            <a:pPr algn="l">
+              <a:spcAft>
+                <a:spcPts val="200"/>
+              </a:spcAft>
+            </a:pPr>
+            <a:r>
+              <a:rPr sz="1250" b="0" i="0">
+                <a:solidFill>
+                  <a:srgbClr val="52514E"/>
+                </a:solidFill>
+                <a:latin typeface="Calibri"/>
+              </a:rPr>
+              <a:t>max_features = sqrt, min_samples_leaf = 2</a:t>
+            </a:r>
+          </a:p>
+        </p:txBody>
+      </p:sp>
+      <p:sp>
+        <p:nvSpPr>
+          <p:cNvPr id="11" name="Rounded Rectangle 10"/>
           <p:cNvSpPr/>
           <p:nvPr/>
         </p:nvSpPr>
         <p:spPr>
           <a:xfrm>
-            <a:off x="8595360" y="4023360"/>
-            <a:ext cx="3063240" cy="822960"/>
+            <a:off x="7863840" y="4425696"/>
+            <a:ext cx="3794760" cy="1325880"/>
           </a:xfrm>
           <a:prstGeom prst="roundRect">
             <a:avLst>
@@ -5815,7 +5751,7 @@
             </a:avLst>
           </a:prstGeom>
           <a:solidFill>
-            <a:srgbClr val="F1F5FB"/>
+            <a:srgbClr val="142340"/>
           </a:solidFill>
           <a:ln>
             <a:noFill/>
@@ -5846,22 +5782,22 @@
       </p:sp>
       <p:sp>
         <p:nvSpPr>
-          <p:cNvPr id="19" name="TextBox 18"/>
-          <p:cNvSpPr txBox="1"/>
-          <p:nvPr/>
-        </p:nvSpPr>
-        <p:spPr>
-          <a:xfrm>
-            <a:off x="8778240" y="4133088"/>
-            <a:ext cx="1463040" cy="640080"/>
-          </a:xfrm>
-          <a:prstGeom prst="rect">
-            <a:avLst/>
-          </a:prstGeom>
-          <a:noFill/>
-        </p:spPr>
-        <p:txBody>
-          <a:bodyPr wrap="square" lIns="0" rIns="0" tIns="0" bIns="0" anchor="ctr">
+          <p:cNvPr id="12" name="TextBox 11"/>
+          <p:cNvSpPr txBox="1"/>
+          <p:nvPr/>
+        </p:nvSpPr>
+        <p:spPr>
+          <a:xfrm>
+            <a:off x="8046720" y="4517136"/>
+            <a:ext cx="3474720" cy="320040"/>
+          </a:xfrm>
+          <a:prstGeom prst="rect">
+            <a:avLst/>
+          </a:prstGeom>
+          <a:noFill/>
+        </p:spPr>
+        <p:txBody>
+          <a:bodyPr wrap="square" lIns="0" rIns="0" tIns="0" bIns="0" anchor="t">
             <a:spAutoFit/>
           </a:bodyPr>
           <a:lstStyle/>
@@ -5870,60 +5806,116 @@
             <a:r>
               <a:rPr sz="1500" b="1" i="0">
                 <a:solidFill>
-                  <a:srgbClr val="142340"/>
-                </a:solidFill>
-                <a:latin typeface="Calibri"/>
-              </a:rPr>
-              <a:t>Grade 3</a:t>
-            </a:r>
-          </a:p>
-        </p:txBody>
-      </p:sp>
-      <p:sp>
-        <p:nvSpPr>
-          <p:cNvPr id="20" name="TextBox 19"/>
-          <p:cNvSpPr txBox="1"/>
-          <p:nvPr/>
-        </p:nvSpPr>
-        <p:spPr>
-          <a:xfrm>
-            <a:off x="10149840" y="4096512"/>
-            <a:ext cx="1371600" cy="685800"/>
-          </a:xfrm>
-          <a:prstGeom prst="rect">
-            <a:avLst/>
-          </a:prstGeom>
-          <a:noFill/>
-        </p:spPr>
-        <p:txBody>
-          <a:bodyPr wrap="square" lIns="0" rIns="0" tIns="0" bIns="0" anchor="ctr">
-            <a:spAutoFit/>
-          </a:bodyPr>
-          <a:lstStyle/>
-          <a:p>
-            <a:pPr algn="r"/>
-            <a:r>
-              <a:rPr sz="2600" b="1" i="0">
+                  <a:srgbClr val="FFFFFF"/>
+                </a:solidFill>
+                <a:latin typeface="Calibri"/>
+              </a:rPr>
+              <a:t>HistGradientBoosting  ·  final model</a:t>
+            </a:r>
+          </a:p>
+        </p:txBody>
+      </p:sp>
+      <p:sp>
+        <p:nvSpPr>
+          <p:cNvPr id="13" name="TextBox 12"/>
+          <p:cNvSpPr txBox="1"/>
+          <p:nvPr/>
+        </p:nvSpPr>
+        <p:spPr>
+          <a:xfrm>
+            <a:off x="8046720" y="4864608"/>
+            <a:ext cx="3474720" cy="868680"/>
+          </a:xfrm>
+          <a:prstGeom prst="rect">
+            <a:avLst/>
+          </a:prstGeom>
+          <a:noFill/>
+        </p:spPr>
+        <p:txBody>
+          <a:bodyPr wrap="square" lIns="0" rIns="0" tIns="0" bIns="0" anchor="t">
+            <a:spAutoFit/>
+          </a:bodyPr>
+          <a:lstStyle/>
+          <a:p>
+            <a:pPr algn="l">
+              <a:spcAft>
+                <a:spcPts val="200"/>
+              </a:spcAft>
+            </a:pPr>
+            <a:r>
+              <a:rPr sz="1250" b="0" i="0">
+                <a:solidFill>
+                  <a:srgbClr val="86B6EF"/>
+                </a:solidFill>
+                <a:latin typeface="Calibri"/>
+              </a:rPr>
+              <a:t>CV </a:t>
+            </a:r>
+            <a:r>
+              <a:rPr sz="1250" b="1" i="0">
                 <a:solidFill>
                   <a:srgbClr val="EB6834"/>
                 </a:solidFill>
-                <a:latin typeface="Cambria"/>
-              </a:rPr>
-              <a:t>0.63</a:t>
-            </a:r>
-          </a:p>
-        </p:txBody>
-      </p:sp>
-      <p:sp>
-        <p:nvSpPr>
-          <p:cNvPr id="21" name="TextBox 20"/>
-          <p:cNvSpPr txBox="1"/>
-          <p:nvPr/>
-        </p:nvSpPr>
-        <p:spPr>
-          <a:xfrm>
-            <a:off x="8595360" y="5074920"/>
-            <a:ext cx="3108960" cy="1188720"/>
+                <a:latin typeface="Calibri"/>
+              </a:rPr>
+              <a:t>0.745</a:t>
+            </a:r>
+            <a:r>
+              <a:rPr sz="1250" b="0" i="0">
+                <a:solidFill>
+                  <a:srgbClr val="86B6EF"/>
+                </a:solidFill>
+                <a:latin typeface="Calibri"/>
+              </a:rPr>
+              <a:t>   holdout </a:t>
+            </a:r>
+            <a:r>
+              <a:rPr sz="1250" b="1" i="0">
+                <a:solidFill>
+                  <a:srgbClr val="EB6834"/>
+                </a:solidFill>
+                <a:latin typeface="Calibri"/>
+              </a:rPr>
+              <a:t>0.750</a:t>
+            </a:r>
+            <a:r>
+              <a:rPr sz="1250" b="0" i="0">
+                <a:solidFill>
+                  <a:srgbClr val="86B6EF"/>
+                </a:solidFill>
+                <a:latin typeface="Calibri"/>
+              </a:rPr>
+              <a:t>  micro-F1</a:t>
+            </a:r>
+          </a:p>
+          <a:p>
+            <a:pPr algn="l">
+              <a:spcAft>
+                <a:spcPts val="200"/>
+              </a:spcAft>
+            </a:pPr>
+            <a:r>
+              <a:rPr sz="1250" b="0" i="0">
+                <a:solidFill>
+                  <a:srgbClr val="86B6EF"/>
+                </a:solidFill>
+                <a:latin typeface="Calibri"/>
+              </a:rPr>
+              <a:t>learning_rate = 0.1, max_leaf_nodes = 31</a:t>
+            </a:r>
+          </a:p>
+        </p:txBody>
+      </p:sp>
+      <p:sp>
+        <p:nvSpPr>
+          <p:cNvPr id="14" name="TextBox 13"/>
+          <p:cNvSpPr txBox="1"/>
+          <p:nvPr/>
+        </p:nvSpPr>
+        <p:spPr>
+          <a:xfrm>
+            <a:off x="548640" y="5989320"/>
+            <a:ext cx="11064240" cy="320040"/>
           </a:xfrm>
           <a:prstGeom prst="rect">
             <a:avLst/>
@@ -5938,20 +5930,20 @@
           <a:p>
             <a:pPr algn="l"/>
             <a:r>
-              <a:rPr sz="1350" b="0" i="0">
-                <a:solidFill>
-                  <a:srgbClr val="52514E"/>
-                </a:solidFill>
-                <a:latin typeface="Calibri"/>
-              </a:rPr>
-              <a:t>Errors are almost all between adjacent grades: only 0.5% of grade-3 buildings are predicted as grade 1.</a:t>
-            </a:r>
-          </a:p>
-        </p:txBody>
-      </p:sp>
-      <p:sp>
-        <p:nvSpPr>
-          <p:cNvPr id="22" name="TextBox 21"/>
+              <a:rPr sz="1250" b="0" i="0">
+                <a:solidFill>
+                  <a:srgbClr val="8A8984"/>
+                </a:solidFill>
+                <a:latin typeface="Calibri"/>
+              </a:rPr>
+              <a:t>Same features, same 5 folds. Final model chosen by CV micro-F1; vs LR: +0.98 pp in CV, +0.93 pp on the holdout.</a:t>
+            </a:r>
+          </a:p>
+        </p:txBody>
+      </p:sp>
+      <p:sp>
+        <p:nvSpPr>
+          <p:cNvPr id="15" name="TextBox 14"/>
           <p:cNvSpPr txBox="1"/>
           <p:nvPr/>
         </p:nvSpPr>
@@ -5979,14 +5971,14 @@
                 </a:solidFill>
                 <a:latin typeface="Calibri"/>
               </a:rPr>
-              <a:t>Group [XX]  ·  Earthquake damage prediction with logistic regression</a:t>
-            </a:r>
-          </a:p>
-        </p:txBody>
-      </p:sp>
-      <p:sp>
-        <p:nvSpPr>
-          <p:cNvPr id="23" name="TextBox 22"/>
+              <a:t>Group [XX]  ·  Earthquake damage prediction: logistic regression, random forest, gradient boosting</a:t>
+            </a:r>
+          </a:p>
+        </p:txBody>
+      </p:sp>
+      <p:sp>
+        <p:nvSpPr>
+          <p:cNvPr id="16" name="TextBox 15"/>
           <p:cNvSpPr txBox="1"/>
           <p:nvPr/>
         </p:nvSpPr>
@@ -6110,14 +6102,226 @@
                 </a:solidFill>
                 <a:latin typeface="Cambria"/>
               </a:rPr>
-              <a:t>Ranking finds destroyed buildings far faster than random</a:t>
+              <a:t>Final model on the holdout: HistGradientBoosting</a:t>
+            </a:r>
+          </a:p>
+        </p:txBody>
+      </p:sp>
+      <p:sp>
+        <p:nvSpPr>
+          <p:cNvPr id="4" name="TextBox 3"/>
+          <p:cNvSpPr txBox="1"/>
+          <p:nvPr/>
+        </p:nvSpPr>
+        <p:spPr>
+          <a:xfrm>
+            <a:off x="548640" y="1600200"/>
+            <a:ext cx="3017520" cy="685800"/>
+          </a:xfrm>
+          <a:prstGeom prst="rect">
+            <a:avLst/>
+          </a:prstGeom>
+          <a:noFill/>
+        </p:spPr>
+        <p:txBody>
+          <a:bodyPr wrap="square" lIns="0" rIns="0" tIns="0" bIns="0" anchor="t">
+            <a:spAutoFit/>
+          </a:bodyPr>
+          <a:lstStyle/>
+          <a:p>
+            <a:pPr algn="l"/>
+            <a:r>
+              <a:rPr sz="4800" b="1" i="0">
+                <a:solidFill>
+                  <a:srgbClr val="EB6834"/>
+                </a:solidFill>
+                <a:latin typeface="Cambria"/>
+              </a:rPr>
+              <a:t>0.750</a:t>
+            </a:r>
+          </a:p>
+        </p:txBody>
+      </p:sp>
+      <p:sp>
+        <p:nvSpPr>
+          <p:cNvPr id="5" name="TextBox 4"/>
+          <p:cNvSpPr txBox="1"/>
+          <p:nvPr/>
+        </p:nvSpPr>
+        <p:spPr>
+          <a:xfrm>
+            <a:off x="548640" y="2331720"/>
+            <a:ext cx="3017520" cy="640080"/>
+          </a:xfrm>
+          <a:prstGeom prst="rect">
+            <a:avLst/>
+          </a:prstGeom>
+          <a:noFill/>
+        </p:spPr>
+        <p:txBody>
+          <a:bodyPr wrap="square" lIns="0" rIns="0" tIns="0" bIns="0" anchor="t">
+            <a:spAutoFit/>
+          </a:bodyPr>
+          <a:lstStyle/>
+          <a:p>
+            <a:pPr algn="l"/>
+            <a:r>
+              <a:rPr sz="1400" b="0" i="0">
+                <a:solidFill>
+                  <a:srgbClr val="52514E"/>
+                </a:solidFill>
+                <a:latin typeface="Calibri"/>
+              </a:rPr>
+              <a:t>holdout micro-F1
+(competition metric)</a:t>
+            </a:r>
+          </a:p>
+        </p:txBody>
+      </p:sp>
+      <p:sp>
+        <p:nvSpPr>
+          <p:cNvPr id="6" name="TextBox 5"/>
+          <p:cNvSpPr txBox="1"/>
+          <p:nvPr/>
+        </p:nvSpPr>
+        <p:spPr>
+          <a:xfrm>
+            <a:off x="548640" y="3108960"/>
+            <a:ext cx="3017520" cy="685800"/>
+          </a:xfrm>
+          <a:prstGeom prst="rect">
+            <a:avLst/>
+          </a:prstGeom>
+          <a:noFill/>
+        </p:spPr>
+        <p:txBody>
+          <a:bodyPr wrap="square" lIns="0" rIns="0" tIns="0" bIns="0" anchor="t">
+            <a:spAutoFit/>
+          </a:bodyPr>
+          <a:lstStyle/>
+          <a:p>
+            <a:pPr algn="l"/>
+            <a:r>
+              <a:rPr sz="4000" b="1" i="0">
+                <a:solidFill>
+                  <a:srgbClr val="142340"/>
+                </a:solidFill>
+                <a:latin typeface="Cambria"/>
+              </a:rPr>
+              <a:t>0.701</a:t>
+            </a:r>
+          </a:p>
+        </p:txBody>
+      </p:sp>
+      <p:sp>
+        <p:nvSpPr>
+          <p:cNvPr id="7" name="TextBox 6"/>
+          <p:cNvSpPr txBox="1"/>
+          <p:nvPr/>
+        </p:nvSpPr>
+        <p:spPr>
+          <a:xfrm>
+            <a:off x="548640" y="3840480"/>
+            <a:ext cx="3017520" cy="640080"/>
+          </a:xfrm>
+          <a:prstGeom prst="rect">
+            <a:avLst/>
+          </a:prstGeom>
+          <a:noFill/>
+        </p:spPr>
+        <p:txBody>
+          <a:bodyPr wrap="square" lIns="0" rIns="0" tIns="0" bIns="0" anchor="t">
+            <a:spAutoFit/>
+          </a:bodyPr>
+          <a:lstStyle/>
+          <a:p>
+            <a:pPr algn="l"/>
+            <a:r>
+              <a:rPr sz="1400" b="0" i="0">
+                <a:solidFill>
+                  <a:srgbClr val="52514E"/>
+                </a:solidFill>
+                <a:latin typeface="Calibri"/>
+              </a:rPr>
+              <a:t>holdout macro-F1</a:t>
+            </a:r>
+          </a:p>
+        </p:txBody>
+      </p:sp>
+      <p:sp>
+        <p:nvSpPr>
+          <p:cNvPr id="8" name="TextBox 7"/>
+          <p:cNvSpPr txBox="1"/>
+          <p:nvPr/>
+        </p:nvSpPr>
+        <p:spPr>
+          <a:xfrm>
+            <a:off x="548640" y="4434840"/>
+            <a:ext cx="3017520" cy="685800"/>
+          </a:xfrm>
+          <a:prstGeom prst="rect">
+            <a:avLst/>
+          </a:prstGeom>
+          <a:noFill/>
+        </p:spPr>
+        <p:txBody>
+          <a:bodyPr wrap="square" lIns="0" rIns="0" tIns="0" bIns="0" anchor="t">
+            <a:spAutoFit/>
+          </a:bodyPr>
+          <a:lstStyle/>
+          <a:p>
+            <a:pPr algn="l"/>
+            <a:r>
+              <a:rPr sz="3200" b="1" i="0">
+                <a:solidFill>
+                  <a:srgbClr val="142340"/>
+                </a:solidFill>
+                <a:latin typeface="Cambria"/>
+              </a:rPr>
+              <a:t>0.745</a:t>
+            </a:r>
+          </a:p>
+        </p:txBody>
+      </p:sp>
+      <p:sp>
+        <p:nvSpPr>
+          <p:cNvPr id="9" name="TextBox 8"/>
+          <p:cNvSpPr txBox="1"/>
+          <p:nvPr/>
+        </p:nvSpPr>
+        <p:spPr>
+          <a:xfrm>
+            <a:off x="548640" y="5166359"/>
+            <a:ext cx="3017520" cy="640080"/>
+          </a:xfrm>
+          <a:prstGeom prst="rect">
+            <a:avLst/>
+          </a:prstGeom>
+          <a:noFill/>
+        </p:spPr>
+        <p:txBody>
+          <a:bodyPr wrap="square" lIns="0" rIns="0" tIns="0" bIns="0" anchor="t">
+            <a:spAutoFit/>
+          </a:bodyPr>
+          <a:lstStyle/>
+          <a:p>
+            <a:pPr algn="l"/>
+            <a:r>
+              <a:rPr sz="1400" b="0" i="0">
+                <a:solidFill>
+                  <a:srgbClr val="52514E"/>
+                </a:solidFill>
+                <a:latin typeface="Calibri"/>
+              </a:rPr>
+              <a:t>CV micro-F1
+(holdout agrees with CV)</a:t>
             </a:r>
           </a:p>
         </p:txBody>
       </p:sp>
       <p:pic>
         <p:nvPicPr>
-          <p:cNvPr id="4" name="Picture 3" descr="fig10_prioritisation_curve.png"/>
+          <p:cNvPr id="10" name="Picture 9" descr="fig15_confusion_final.png"/>
           <p:cNvPicPr>
             <a:picLocks noChangeAspect="1"/>
           </p:cNvPicPr>
@@ -6131,8 +6335,8 @@
         </p:blipFill>
         <p:spPr>
           <a:xfrm>
-            <a:off x="457200" y="1840747"/>
-            <a:ext cx="6766559" cy="3999465"/>
+            <a:off x="3566160" y="2044519"/>
+            <a:ext cx="4754880" cy="3591921"/>
           </a:xfrm>
           <a:prstGeom prst="rect">
             <a:avLst/>
@@ -6141,14 +6345,49 @@
       </p:pic>
       <p:sp>
         <p:nvSpPr>
-          <p:cNvPr id="5" name="Rounded Rectangle 4"/>
+          <p:cNvPr id="11" name="TextBox 10"/>
+          <p:cNvSpPr txBox="1"/>
+          <p:nvPr/>
+        </p:nvSpPr>
+        <p:spPr>
+          <a:xfrm>
+            <a:off x="8595360" y="1600200"/>
+            <a:ext cx="3108960" cy="365760"/>
+          </a:xfrm>
+          <a:prstGeom prst="rect">
+            <a:avLst/>
+          </a:prstGeom>
+          <a:noFill/>
+        </p:spPr>
+        <p:txBody>
+          <a:bodyPr wrap="square" lIns="0" rIns="0" tIns="0" bIns="0" anchor="t">
+            <a:spAutoFit/>
+          </a:bodyPr>
+          <a:lstStyle/>
+          <a:p>
+            <a:pPr algn="l"/>
+            <a:r>
+              <a:rPr sz="1700" b="1" i="0">
+                <a:solidFill>
+                  <a:srgbClr val="142340"/>
+                </a:solidFill>
+                <a:latin typeface="Calibri"/>
+              </a:rPr>
+              <a:t>Holdout recall (vs LR)</a:t>
+            </a:r>
+          </a:p>
+        </p:txBody>
+      </p:sp>
+      <p:sp>
+        <p:nvSpPr>
+          <p:cNvPr id="12" name="Rounded Rectangle 11"/>
           <p:cNvSpPr/>
           <p:nvPr/>
         </p:nvSpPr>
         <p:spPr>
           <a:xfrm>
-            <a:off x="7589520" y="1554480"/>
-            <a:ext cx="4069080" cy="1298448"/>
+            <a:off x="8595360" y="2103120"/>
+            <a:ext cx="3063240" cy="822960"/>
           </a:xfrm>
           <a:prstGeom prst="roundRect">
             <a:avLst>
@@ -6187,104 +6426,119 @@
       </p:sp>
       <p:sp>
         <p:nvSpPr>
-          <p:cNvPr id="6" name="TextBox 5"/>
-          <p:cNvSpPr txBox="1"/>
-          <p:nvPr/>
-        </p:nvSpPr>
-        <p:spPr>
-          <a:xfrm>
-            <a:off x="7818120" y="1691639"/>
-            <a:ext cx="1737360" cy="731520"/>
-          </a:xfrm>
-          <a:prstGeom prst="rect">
-            <a:avLst/>
-          </a:prstGeom>
-          <a:noFill/>
-        </p:spPr>
-        <p:txBody>
-          <a:bodyPr wrap="square" lIns="0" rIns="0" tIns="0" bIns="0" anchor="t">
+          <p:cNvPr id="13" name="TextBox 12"/>
+          <p:cNvSpPr txBox="1"/>
+          <p:nvPr/>
+        </p:nvSpPr>
+        <p:spPr>
+          <a:xfrm>
+            <a:off x="8778240" y="2212848"/>
+            <a:ext cx="1188720" cy="640080"/>
+          </a:xfrm>
+          <a:prstGeom prst="rect">
+            <a:avLst/>
+          </a:prstGeom>
+          <a:noFill/>
+        </p:spPr>
+        <p:txBody>
+          <a:bodyPr wrap="square" lIns="0" rIns="0" tIns="0" bIns="0" anchor="ctr">
             <a:spAutoFit/>
           </a:bodyPr>
           <a:lstStyle/>
           <a:p>
             <a:pPr algn="l"/>
             <a:r>
-              <a:rPr sz="4000" b="1" i="0">
-                <a:solidFill>
-                  <a:srgbClr val="EB6834"/>
+              <a:rPr sz="1500" b="1" i="0">
+                <a:solidFill>
+                  <a:srgbClr val="142340"/>
+                </a:solidFill>
+                <a:latin typeface="Calibri"/>
+              </a:rPr>
+              <a:t>Grade 1</a:t>
+            </a:r>
+          </a:p>
+        </p:txBody>
+      </p:sp>
+      <p:sp>
+        <p:nvSpPr>
+          <p:cNvPr id="14" name="TextBox 13"/>
+          <p:cNvSpPr txBox="1"/>
+          <p:nvPr/>
+        </p:nvSpPr>
+        <p:spPr>
+          <a:xfrm>
+            <a:off x="9829800" y="2176272"/>
+            <a:ext cx="914400" cy="685800"/>
+          </a:xfrm>
+          <a:prstGeom prst="rect">
+            <a:avLst/>
+          </a:prstGeom>
+          <a:noFill/>
+        </p:spPr>
+        <p:txBody>
+          <a:bodyPr wrap="square" lIns="0" rIns="0" tIns="0" bIns="0" anchor="ctr">
+            <a:spAutoFit/>
+          </a:bodyPr>
+          <a:lstStyle/>
+          <a:p>
+            <a:pPr algn="r"/>
+            <a:r>
+              <a:rPr sz="2600" b="1" i="0">
+                <a:solidFill>
+                  <a:srgbClr val="142340"/>
                 </a:solidFill>
                 <a:latin typeface="Cambria"/>
               </a:rPr>
-              <a:t>28%</a:t>
-            </a:r>
-          </a:p>
-        </p:txBody>
-      </p:sp>
-      <p:sp>
-        <p:nvSpPr>
-          <p:cNvPr id="7" name="TextBox 6"/>
-          <p:cNvSpPr txBox="1"/>
-          <p:nvPr/>
-        </p:nvSpPr>
-        <p:spPr>
-          <a:xfrm>
-            <a:off x="9555480" y="1737360"/>
-            <a:ext cx="2011680" cy="1005840"/>
-          </a:xfrm>
-          <a:prstGeom prst="rect">
-            <a:avLst/>
-          </a:prstGeom>
-          <a:noFill/>
-        </p:spPr>
-        <p:txBody>
-          <a:bodyPr wrap="square" lIns="0" rIns="0" tIns="0" bIns="0" anchor="t">
-            <a:spAutoFit/>
-          </a:bodyPr>
-          <a:lstStyle/>
-          <a:p>
-            <a:pPr algn="l">
-              <a:spcAft>
-                <a:spcPts val="300"/>
-              </a:spcAft>
-            </a:pPr>
-            <a:r>
-              <a:rPr sz="1350" b="0" i="0">
-                <a:solidFill>
-                  <a:srgbClr val="52514E"/>
-                </a:solidFill>
-                <a:latin typeface="Calibri"/>
-              </a:rPr>
-              <a:t>of grade-3 buildings found by inspecting the top 10%</a:t>
-            </a:r>
-          </a:p>
-          <a:p>
-            <a:pPr algn="l">
-              <a:spcAft>
-                <a:spcPts val="300"/>
-              </a:spcAft>
-            </a:pPr>
-            <a:r>
-              <a:rPr sz="1350" b="1" i="0">
-                <a:solidFill>
-                  <a:srgbClr val="142340"/>
-                </a:solidFill>
-                <a:latin typeface="Calibri"/>
-              </a:rPr>
-              <a:t>2.8× better than random</a:t>
-            </a:r>
-          </a:p>
-        </p:txBody>
-      </p:sp>
-      <p:sp>
-        <p:nvSpPr>
-          <p:cNvPr id="8" name="Rounded Rectangle 7"/>
+              <a:t>0.55</a:t>
+            </a:r>
+          </a:p>
+        </p:txBody>
+      </p:sp>
+      <p:sp>
+        <p:nvSpPr>
+          <p:cNvPr id="15" name="TextBox 14"/>
+          <p:cNvSpPr txBox="1"/>
+          <p:nvPr/>
+        </p:nvSpPr>
+        <p:spPr>
+          <a:xfrm>
+            <a:off x="10835640" y="2176272"/>
+            <a:ext cx="731520" cy="685800"/>
+          </a:xfrm>
+          <a:prstGeom prst="rect">
+            <a:avLst/>
+          </a:prstGeom>
+          <a:noFill/>
+        </p:spPr>
+        <p:txBody>
+          <a:bodyPr wrap="square" lIns="0" rIns="0" tIns="0" bIns="0" anchor="ctr">
+            <a:spAutoFit/>
+          </a:bodyPr>
+          <a:lstStyle/>
+          <a:p>
+            <a:pPr algn="r"/>
+            <a:r>
+              <a:rPr sz="1300" b="0" i="0">
+                <a:solidFill>
+                  <a:srgbClr val="8A8984"/>
+                </a:solidFill>
+                <a:latin typeface="Calibri"/>
+              </a:rPr>
+              <a:t>(0.48)</a:t>
+            </a:r>
+          </a:p>
+        </p:txBody>
+      </p:sp>
+      <p:sp>
+        <p:nvSpPr>
+          <p:cNvPr id="16" name="Rounded Rectangle 15"/>
           <p:cNvSpPr/>
           <p:nvPr/>
         </p:nvSpPr>
         <p:spPr>
           <a:xfrm>
-            <a:off x="7589520" y="3017520"/>
-            <a:ext cx="4069080" cy="1298448"/>
+            <a:off x="8595360" y="3063239"/>
+            <a:ext cx="3063240" cy="822960"/>
           </a:xfrm>
           <a:prstGeom prst="roundRect">
             <a:avLst>
@@ -6323,104 +6577,119 @@
       </p:sp>
       <p:sp>
         <p:nvSpPr>
-          <p:cNvPr id="9" name="TextBox 8"/>
-          <p:cNvSpPr txBox="1"/>
-          <p:nvPr/>
-        </p:nvSpPr>
-        <p:spPr>
-          <a:xfrm>
-            <a:off x="7818120" y="3154679"/>
-            <a:ext cx="1737360" cy="731520"/>
-          </a:xfrm>
-          <a:prstGeom prst="rect">
-            <a:avLst/>
-          </a:prstGeom>
-          <a:noFill/>
-        </p:spPr>
-        <p:txBody>
-          <a:bodyPr wrap="square" lIns="0" rIns="0" tIns="0" bIns="0" anchor="t">
+          <p:cNvPr id="17" name="TextBox 16"/>
+          <p:cNvSpPr txBox="1"/>
+          <p:nvPr/>
+        </p:nvSpPr>
+        <p:spPr>
+          <a:xfrm>
+            <a:off x="8778240" y="3172968"/>
+            <a:ext cx="1188720" cy="640080"/>
+          </a:xfrm>
+          <a:prstGeom prst="rect">
+            <a:avLst/>
+          </a:prstGeom>
+          <a:noFill/>
+        </p:spPr>
+        <p:txBody>
+          <a:bodyPr wrap="square" lIns="0" rIns="0" tIns="0" bIns="0" anchor="ctr">
             <a:spAutoFit/>
           </a:bodyPr>
           <a:lstStyle/>
           <a:p>
             <a:pPr algn="l"/>
             <a:r>
-              <a:rPr sz="4000" b="1" i="0">
-                <a:solidFill>
-                  <a:srgbClr val="EB6834"/>
+              <a:rPr sz="1500" b="1" i="0">
+                <a:solidFill>
+                  <a:srgbClr val="142340"/>
+                </a:solidFill>
+                <a:latin typeface="Calibri"/>
+              </a:rPr>
+              <a:t>Grade 2</a:t>
+            </a:r>
+          </a:p>
+        </p:txBody>
+      </p:sp>
+      <p:sp>
+        <p:nvSpPr>
+          <p:cNvPr id="18" name="TextBox 17"/>
+          <p:cNvSpPr txBox="1"/>
+          <p:nvPr/>
+        </p:nvSpPr>
+        <p:spPr>
+          <a:xfrm>
+            <a:off x="9829800" y="3136391"/>
+            <a:ext cx="914400" cy="685800"/>
+          </a:xfrm>
+          <a:prstGeom prst="rect">
+            <a:avLst/>
+          </a:prstGeom>
+          <a:noFill/>
+        </p:spPr>
+        <p:txBody>
+          <a:bodyPr wrap="square" lIns="0" rIns="0" tIns="0" bIns="0" anchor="ctr">
+            <a:spAutoFit/>
+          </a:bodyPr>
+          <a:lstStyle/>
+          <a:p>
+            <a:pPr algn="r"/>
+            <a:r>
+              <a:rPr sz="2600" b="1" i="0">
+                <a:solidFill>
+                  <a:srgbClr val="142340"/>
                 </a:solidFill>
                 <a:latin typeface="Cambria"/>
               </a:rPr>
-              <a:t>50%</a:t>
-            </a:r>
-          </a:p>
-        </p:txBody>
-      </p:sp>
-      <p:sp>
-        <p:nvSpPr>
-          <p:cNvPr id="10" name="TextBox 9"/>
-          <p:cNvSpPr txBox="1"/>
-          <p:nvPr/>
-        </p:nvSpPr>
-        <p:spPr>
-          <a:xfrm>
-            <a:off x="9555480" y="3200400"/>
-            <a:ext cx="2011680" cy="1005840"/>
-          </a:xfrm>
-          <a:prstGeom prst="rect">
-            <a:avLst/>
-          </a:prstGeom>
-          <a:noFill/>
-        </p:spPr>
-        <p:txBody>
-          <a:bodyPr wrap="square" lIns="0" rIns="0" tIns="0" bIns="0" anchor="t">
-            <a:spAutoFit/>
-          </a:bodyPr>
-          <a:lstStyle/>
-          <a:p>
-            <a:pPr algn="l">
-              <a:spcAft>
-                <a:spcPts val="300"/>
-              </a:spcAft>
-            </a:pPr>
-            <a:r>
-              <a:rPr sz="1350" b="0" i="0">
-                <a:solidFill>
-                  <a:srgbClr val="52514E"/>
-                </a:solidFill>
-                <a:latin typeface="Calibri"/>
-              </a:rPr>
-              <a:t>of grade-3 buildings found by inspecting the top 20%</a:t>
-            </a:r>
-          </a:p>
-          <a:p>
-            <a:pPr algn="l">
-              <a:spcAft>
-                <a:spcPts val="300"/>
-              </a:spcAft>
-            </a:pPr>
-            <a:r>
-              <a:rPr sz="1350" b="1" i="0">
-                <a:solidFill>
-                  <a:srgbClr val="142340"/>
-                </a:solidFill>
-                <a:latin typeface="Calibri"/>
-              </a:rPr>
-              <a:t>2.5× better than random</a:t>
-            </a:r>
-          </a:p>
-        </p:txBody>
-      </p:sp>
-      <p:sp>
-        <p:nvSpPr>
-          <p:cNvPr id="11" name="Rounded Rectangle 10"/>
+              <a:t>0.85</a:t>
+            </a:r>
+          </a:p>
+        </p:txBody>
+      </p:sp>
+      <p:sp>
+        <p:nvSpPr>
+          <p:cNvPr id="19" name="TextBox 18"/>
+          <p:cNvSpPr txBox="1"/>
+          <p:nvPr/>
+        </p:nvSpPr>
+        <p:spPr>
+          <a:xfrm>
+            <a:off x="10835640" y="3136391"/>
+            <a:ext cx="731520" cy="685800"/>
+          </a:xfrm>
+          <a:prstGeom prst="rect">
+            <a:avLst/>
+          </a:prstGeom>
+          <a:noFill/>
+        </p:spPr>
+        <p:txBody>
+          <a:bodyPr wrap="square" lIns="0" rIns="0" tIns="0" bIns="0" anchor="ctr">
+            <a:spAutoFit/>
+          </a:bodyPr>
+          <a:lstStyle/>
+          <a:p>
+            <a:pPr algn="r"/>
+            <a:r>
+              <a:rPr sz="1300" b="0" i="0">
+                <a:solidFill>
+                  <a:srgbClr val="8A8984"/>
+                </a:solidFill>
+                <a:latin typeface="Calibri"/>
+              </a:rPr>
+              <a:t>(0.85)</a:t>
+            </a:r>
+          </a:p>
+        </p:txBody>
+      </p:sp>
+      <p:sp>
+        <p:nvSpPr>
+          <p:cNvPr id="20" name="Rounded Rectangle 19"/>
           <p:cNvSpPr/>
           <p:nvPr/>
         </p:nvSpPr>
         <p:spPr>
           <a:xfrm>
-            <a:off x="7589520" y="4480560"/>
-            <a:ext cx="4069080" cy="1298448"/>
+            <a:off x="8595360" y="4023360"/>
+            <a:ext cx="3063240" cy="822960"/>
           </a:xfrm>
           <a:prstGeom prst="roundRect">
             <a:avLst>
@@ -6459,66 +6728,132 @@
       </p:sp>
       <p:sp>
         <p:nvSpPr>
-          <p:cNvPr id="12" name="TextBox 11"/>
-          <p:cNvSpPr txBox="1"/>
-          <p:nvPr/>
-        </p:nvSpPr>
-        <p:spPr>
-          <a:xfrm>
-            <a:off x="7818120" y="4617720"/>
-            <a:ext cx="1737360" cy="731520"/>
-          </a:xfrm>
-          <a:prstGeom prst="rect">
-            <a:avLst/>
-          </a:prstGeom>
-          <a:noFill/>
-        </p:spPr>
-        <p:txBody>
-          <a:bodyPr wrap="square" lIns="0" rIns="0" tIns="0" bIns="0" anchor="t">
+          <p:cNvPr id="21" name="TextBox 20"/>
+          <p:cNvSpPr txBox="1"/>
+          <p:nvPr/>
+        </p:nvSpPr>
+        <p:spPr>
+          <a:xfrm>
+            <a:off x="8778240" y="4133088"/>
+            <a:ext cx="1188720" cy="640080"/>
+          </a:xfrm>
+          <a:prstGeom prst="rect">
+            <a:avLst/>
+          </a:prstGeom>
+          <a:noFill/>
+        </p:spPr>
+        <p:txBody>
+          <a:bodyPr wrap="square" lIns="0" rIns="0" tIns="0" bIns="0" anchor="ctr">
             <a:spAutoFit/>
           </a:bodyPr>
           <a:lstStyle/>
           <a:p>
             <a:pPr algn="l"/>
             <a:r>
-              <a:rPr sz="4000" b="1" i="0">
+              <a:rPr sz="1500" b="1" i="0">
+                <a:solidFill>
+                  <a:srgbClr val="142340"/>
+                </a:solidFill>
+                <a:latin typeface="Calibri"/>
+              </a:rPr>
+              <a:t>Grade 3</a:t>
+            </a:r>
+          </a:p>
+        </p:txBody>
+      </p:sp>
+      <p:sp>
+        <p:nvSpPr>
+          <p:cNvPr id="22" name="TextBox 21"/>
+          <p:cNvSpPr txBox="1"/>
+          <p:nvPr/>
+        </p:nvSpPr>
+        <p:spPr>
+          <a:xfrm>
+            <a:off x="9829800" y="4096512"/>
+            <a:ext cx="914400" cy="685800"/>
+          </a:xfrm>
+          <a:prstGeom prst="rect">
+            <a:avLst/>
+          </a:prstGeom>
+          <a:noFill/>
+        </p:spPr>
+        <p:txBody>
+          <a:bodyPr wrap="square" lIns="0" rIns="0" tIns="0" bIns="0" anchor="ctr">
+            <a:spAutoFit/>
+          </a:bodyPr>
+          <a:lstStyle/>
+          <a:p>
+            <a:pPr algn="r"/>
+            <a:r>
+              <a:rPr sz="2600" b="1" i="0">
                 <a:solidFill>
                   <a:srgbClr val="EB6834"/>
                 </a:solidFill>
                 <a:latin typeface="Cambria"/>
               </a:rPr>
-              <a:t>66%</a:t>
-            </a:r>
-          </a:p>
-        </p:txBody>
-      </p:sp>
-      <p:sp>
-        <p:nvSpPr>
-          <p:cNvPr id="13" name="TextBox 12"/>
-          <p:cNvSpPr txBox="1"/>
-          <p:nvPr/>
-        </p:nvSpPr>
-        <p:spPr>
-          <a:xfrm>
-            <a:off x="9555480" y="4663440"/>
-            <a:ext cx="2011680" cy="1005840"/>
-          </a:xfrm>
-          <a:prstGeom prst="rect">
-            <a:avLst/>
-          </a:prstGeom>
-          <a:noFill/>
-        </p:spPr>
-        <p:txBody>
-          <a:bodyPr wrap="square" lIns="0" rIns="0" tIns="0" bIns="0" anchor="t">
-            <a:spAutoFit/>
-          </a:bodyPr>
-          <a:lstStyle/>
-          <a:p>
-            <a:pPr algn="l">
-              <a:spcAft>
-                <a:spcPts val="300"/>
-              </a:spcAft>
-            </a:pPr>
+              <a:t>0.64</a:t>
+            </a:r>
+          </a:p>
+        </p:txBody>
+      </p:sp>
+      <p:sp>
+        <p:nvSpPr>
+          <p:cNvPr id="23" name="TextBox 22"/>
+          <p:cNvSpPr txBox="1"/>
+          <p:nvPr/>
+        </p:nvSpPr>
+        <p:spPr>
+          <a:xfrm>
+            <a:off x="10835640" y="4096512"/>
+            <a:ext cx="731520" cy="685800"/>
+          </a:xfrm>
+          <a:prstGeom prst="rect">
+            <a:avLst/>
+          </a:prstGeom>
+          <a:noFill/>
+        </p:spPr>
+        <p:txBody>
+          <a:bodyPr wrap="square" lIns="0" rIns="0" tIns="0" bIns="0" anchor="ctr">
+            <a:spAutoFit/>
+          </a:bodyPr>
+          <a:lstStyle/>
+          <a:p>
+            <a:pPr algn="r"/>
+            <a:r>
+              <a:rPr sz="1300" b="0" i="0">
+                <a:solidFill>
+                  <a:srgbClr val="8A8984"/>
+                </a:solidFill>
+                <a:latin typeface="Calibri"/>
+              </a:rPr>
+              <a:t>(0.63)</a:t>
+            </a:r>
+          </a:p>
+        </p:txBody>
+      </p:sp>
+      <p:sp>
+        <p:nvSpPr>
+          <p:cNvPr id="24" name="TextBox 23"/>
+          <p:cNvSpPr txBox="1"/>
+          <p:nvPr/>
+        </p:nvSpPr>
+        <p:spPr>
+          <a:xfrm>
+            <a:off x="8595360" y="5074920"/>
+            <a:ext cx="3108960" cy="1188720"/>
+          </a:xfrm>
+          <a:prstGeom prst="rect">
+            <a:avLst/>
+          </a:prstGeom>
+          <a:noFill/>
+        </p:spPr>
+        <p:txBody>
+          <a:bodyPr wrap="square" lIns="0" rIns="0" tIns="0" bIns="0" anchor="t">
+            <a:spAutoFit/>
+          </a:bodyPr>
+          <a:lstStyle/>
+          <a:p>
+            <a:pPr algn="l"/>
             <a:r>
               <a:rPr sz="1350" b="0" i="0">
                 <a:solidFill>
@@ -6526,65 +6861,14 @@
                 </a:solidFill>
                 <a:latin typeface="Calibri"/>
               </a:rPr>
-              <a:t>of grade-3 buildings found by inspecting the top 30%</a:t>
-            </a:r>
-          </a:p>
-          <a:p>
-            <a:pPr algn="l">
-              <a:spcAft>
-                <a:spcPts val="300"/>
-              </a:spcAft>
-            </a:pPr>
-            <a:r>
-              <a:rPr sz="1350" b="1" i="0">
-                <a:solidFill>
-                  <a:srgbClr val="142340"/>
-                </a:solidFill>
-                <a:latin typeface="Calibri"/>
-              </a:rPr>
-              <a:t>2.2× better than random</a:t>
-            </a:r>
-          </a:p>
-        </p:txBody>
-      </p:sp>
-      <p:sp>
-        <p:nvSpPr>
-          <p:cNvPr id="14" name="TextBox 13"/>
-          <p:cNvSpPr txBox="1"/>
-          <p:nvPr/>
-        </p:nvSpPr>
-        <p:spPr>
-          <a:xfrm>
-            <a:off x="7589520" y="5943600"/>
-            <a:ext cx="4069080" cy="365760"/>
-          </a:xfrm>
-          <a:prstGeom prst="rect">
-            <a:avLst/>
-          </a:prstGeom>
-          <a:noFill/>
-        </p:spPr>
-        <p:txBody>
-          <a:bodyPr wrap="square" lIns="0" rIns="0" tIns="0" bIns="0" anchor="t">
-            <a:spAutoFit/>
-          </a:bodyPr>
-          <a:lstStyle/>
-          <a:p>
-            <a:pPr algn="l"/>
-            <a:r>
-              <a:rPr sz="1300" b="0" i="0">
-                <a:solidFill>
-                  <a:srgbClr val="8A8984"/>
-                </a:solidFill>
-                <a:latin typeface="Calibri"/>
-              </a:rPr>
-              <a:t>Grade-3 vs rest ROC-AUC = 0.866 on the holdout</a:t>
-            </a:r>
-          </a:p>
-        </p:txBody>
-      </p:sp>
-      <p:sp>
-        <p:nvSpPr>
-          <p:cNvPr id="15" name="TextBox 14"/>
+              <a:t>Errors are almost all between adjacent grades: only 0.6% of grade-3 buildings are predicted as grade 1.</a:t>
+            </a:r>
+          </a:p>
+        </p:txBody>
+      </p:sp>
+      <p:sp>
+        <p:nvSpPr>
+          <p:cNvPr id="25" name="TextBox 24"/>
           <p:cNvSpPr txBox="1"/>
           <p:nvPr/>
         </p:nvSpPr>
@@ -6612,14 +6896,14 @@
                 </a:solidFill>
                 <a:latin typeface="Calibri"/>
               </a:rPr>
-              <a:t>Group [XX]  ·  Earthquake damage prediction with logistic regression</a:t>
-            </a:r>
-          </a:p>
-        </p:txBody>
-      </p:sp>
-      <p:sp>
-        <p:nvSpPr>
-          <p:cNvPr id="16" name="TextBox 15"/>
+              <a:t>Group [XX]  ·  Earthquake damage prediction: logistic regression, random forest, gradient boosting</a:t>
+            </a:r>
+          </a:p>
+        </p:txBody>
+      </p:sp>
+      <p:sp>
+        <p:nvSpPr>
+          <p:cNvPr id="26" name="TextBox 25"/>
           <p:cNvSpPr txBox="1"/>
           <p:nvPr/>
         </p:nvSpPr>
@@ -6743,14 +7027,14 @@
                 </a:solidFill>
                 <a:latin typeface="Cambria"/>
               </a:rPr>
-              <a:t>What raises the odds of destruction?</a:t>
+              <a:t>Ranking finds destroyed buildings far faster than random</a:t>
             </a:r>
           </a:p>
         </p:txBody>
       </p:sp>
       <p:pic>
         <p:nvPicPr>
-          <p:cNvPr id="4" name="Picture 3" descr="fig11b_coefficients_slide.png"/>
+          <p:cNvPr id="4" name="Picture 3" descr="fig14_capture_comparison.png"/>
           <p:cNvPicPr>
             <a:picLocks noChangeAspect="1"/>
           </p:cNvPicPr>
@@ -6764,8 +7048,8 @@
         </p:blipFill>
         <p:spPr>
           <a:xfrm>
-            <a:off x="457200" y="1979334"/>
-            <a:ext cx="6126480" cy="3722290"/>
+            <a:off x="457199" y="1461255"/>
+            <a:ext cx="6766560" cy="4758448"/>
           </a:xfrm>
           <a:prstGeom prst="rect">
             <a:avLst/>
@@ -6780,160 +7064,8 @@
         </p:nvSpPr>
         <p:spPr>
           <a:xfrm>
-            <a:off x="6766560" y="1463040"/>
-            <a:ext cx="4892040" cy="1463040"/>
-          </a:xfrm>
-          <a:prstGeom prst="roundRect">
-            <a:avLst>
-              <a:gd name="adj" fmla="val 8000"/>
-            </a:avLst>
-          </a:prstGeom>
-          <a:solidFill>
-            <a:srgbClr val="FCECEC"/>
-          </a:solidFill>
-          <a:ln>
-            <a:noFill/>
-          </a:ln>
-          <a:effectLst/>
-        </p:spPr>
-        <p:style>
-          <a:lnRef idx="1">
-            <a:schemeClr val="accent1"/>
-          </a:lnRef>
-          <a:fillRef idx="3">
-            <a:schemeClr val="accent1"/>
-          </a:fillRef>
-          <a:effectRef idx="2">
-            <a:schemeClr val="accent1"/>
-          </a:effectRef>
-          <a:fontRef idx="minor">
-            <a:schemeClr val="lt1"/>
-          </a:fontRef>
-        </p:style>
-        <p:txBody>
-          <a:bodyPr rtlCol="0" anchor="ctr"/>
-          <a:lstStyle/>
-          <a:p>
-            <a:pPr algn="ctr"/>
-          </a:p>
-        </p:txBody>
-      </p:sp>
-      <p:sp>
-        <p:nvSpPr>
-          <p:cNvPr id="6" name="TextBox 5"/>
-          <p:cNvSpPr txBox="1"/>
-          <p:nvPr/>
-        </p:nvSpPr>
-        <p:spPr>
-          <a:xfrm>
-            <a:off x="6995160" y="1572768"/>
-            <a:ext cx="4480560" cy="320040"/>
-          </a:xfrm>
-          <a:prstGeom prst="rect">
-            <a:avLst/>
-          </a:prstGeom>
-          <a:noFill/>
-        </p:spPr>
-        <p:txBody>
-          <a:bodyPr wrap="square" lIns="0" rIns="0" tIns="0" bIns="0" anchor="t">
-            <a:spAutoFit/>
-          </a:bodyPr>
-          <a:lstStyle/>
-          <a:p>
-            <a:pPr algn="l"/>
-            <a:r>
-              <a:rPr sz="1600" b="1" i="0">
-                <a:solidFill>
-                  <a:srgbClr val="B32E2D"/>
-                </a:solidFill>
-                <a:latin typeface="Calibri"/>
-              </a:rPr>
-              <a:t>Raise grade-3 odds</a:t>
-            </a:r>
-          </a:p>
-        </p:txBody>
-      </p:sp>
-      <p:sp>
-        <p:nvSpPr>
-          <p:cNvPr id="7" name="TextBox 6"/>
-          <p:cNvSpPr txBox="1"/>
-          <p:nvPr/>
-        </p:nvSpPr>
-        <p:spPr>
-          <a:xfrm>
-            <a:off x="6995160" y="1938528"/>
-            <a:ext cx="4480560" cy="960120"/>
-          </a:xfrm>
-          <a:prstGeom prst="rect">
-            <a:avLst/>
-          </a:prstGeom>
-          <a:noFill/>
-        </p:spPr>
-        <p:txBody>
-          <a:bodyPr wrap="square" lIns="0" rIns="0" tIns="0" bIns="0" anchor="t">
-            <a:spAutoFit/>
-          </a:bodyPr>
-          <a:lstStyle/>
-          <a:p>
-            <a:pPr algn="l">
-              <a:spcAft>
-                <a:spcPts val="200"/>
-              </a:spcAft>
-            </a:pPr>
-            <a:r>
-              <a:rPr sz="1400" b="0" i="0">
-                <a:solidFill>
-                  <a:srgbClr val="0B0B0B"/>
-                </a:solidFill>
-                <a:latin typeface="Calibri"/>
-              </a:rPr>
-              <a:t>superstructure: mud mortar stone: ×1.38</a:t>
-            </a:r>
-          </a:p>
-          <a:p>
-            <a:pPr algn="l">
-              <a:spcAft>
-                <a:spcPts val="200"/>
-              </a:spcAft>
-            </a:pPr>
-            <a:r>
-              <a:rPr sz="1400" b="0" i="0">
-                <a:solidFill>
-                  <a:srgbClr val="0B0B0B"/>
-                </a:solidFill>
-                <a:latin typeface="Calibri"/>
-              </a:rPr>
-              <a:t>age: ×1.37</a:t>
-            </a:r>
-          </a:p>
-          <a:p>
-            <a:pPr algn="l">
-              <a:spcAft>
-                <a:spcPts val="200"/>
-              </a:spcAft>
-            </a:pPr>
-            <a:r>
-              <a:rPr sz="1400" b="0" i="0">
-                <a:solidFill>
-                  <a:srgbClr val="0B0B0B"/>
-                </a:solidFill>
-                <a:latin typeface="Calibri"/>
-              </a:rPr>
-              <a:t>superstructure: stone flag: ×1.31</a:t>
-            </a:r>
-          </a:p>
-        </p:txBody>
-      </p:sp>
-      <p:sp>
-        <p:nvSpPr>
-          <p:cNvPr id="8" name="Rounded Rectangle 7"/>
-          <p:cNvSpPr/>
-          <p:nvPr/>
-        </p:nvSpPr>
-        <p:spPr>
-          <a:xfrm>
-            <a:off x="6766560" y="3063240"/>
-            <a:ext cx="4892040" cy="1463040"/>
+            <a:off x="7589520" y="1554480"/>
+            <a:ext cx="4069080" cy="1298448"/>
           </a:xfrm>
           <a:prstGeom prst="roundRect">
             <a:avLst>
@@ -6972,14 +7104,14 @@
       </p:sp>
       <p:sp>
         <p:nvSpPr>
-          <p:cNvPr id="9" name="TextBox 8"/>
-          <p:cNvSpPr txBox="1"/>
-          <p:nvPr/>
-        </p:nvSpPr>
-        <p:spPr>
-          <a:xfrm>
-            <a:off x="6995160" y="3172968"/>
-            <a:ext cx="4480560" cy="320040"/>
+          <p:cNvPr id="6" name="TextBox 5"/>
+          <p:cNvSpPr txBox="1"/>
+          <p:nvPr/>
+        </p:nvSpPr>
+        <p:spPr>
+          <a:xfrm>
+            <a:off x="7818120" y="1691639"/>
+            <a:ext cx="1737360" cy="731520"/>
           </a:xfrm>
           <a:prstGeom prst="rect">
             <a:avLst/>
@@ -6994,27 +7126,27 @@
           <a:p>
             <a:pPr algn="l"/>
             <a:r>
-              <a:rPr sz="1600" b="1" i="0">
-                <a:solidFill>
-                  <a:srgbClr val="104281"/>
-                </a:solidFill>
-                <a:latin typeface="Calibri"/>
-              </a:rPr>
-              <a:t>Lower grade-3 odds</a:t>
-            </a:r>
-          </a:p>
-        </p:txBody>
-      </p:sp>
-      <p:sp>
-        <p:nvSpPr>
-          <p:cNvPr id="10" name="TextBox 9"/>
-          <p:cNvSpPr txBox="1"/>
-          <p:nvPr/>
-        </p:nvSpPr>
-        <p:spPr>
-          <a:xfrm>
-            <a:off x="6995160" y="3538728"/>
-            <a:ext cx="4480560" cy="960120"/>
+              <a:rPr sz="4000" b="1" i="0">
+                <a:solidFill>
+                  <a:srgbClr val="EB6834"/>
+                </a:solidFill>
+                <a:latin typeface="Cambria"/>
+              </a:rPr>
+              <a:t>28%</a:t>
+            </a:r>
+          </a:p>
+        </p:txBody>
+      </p:sp>
+      <p:sp>
+        <p:nvSpPr>
+          <p:cNvPr id="7" name="TextBox 6"/>
+          <p:cNvSpPr txBox="1"/>
+          <p:nvPr/>
+        </p:nvSpPr>
+        <p:spPr>
+          <a:xfrm>
+            <a:off x="9555480" y="1737360"/>
+            <a:ext cx="2011680" cy="1005840"/>
           </a:xfrm>
           <a:prstGeom prst="rect">
             <a:avLst/>
@@ -7029,63 +7161,47 @@
           <a:p>
             <a:pPr algn="l">
               <a:spcAft>
-                <a:spcPts val="200"/>
+                <a:spcPts val="300"/>
               </a:spcAft>
             </a:pPr>
             <a:r>
-              <a:rPr sz="1400" b="0" i="0">
-                <a:solidFill>
-                  <a:srgbClr val="0B0B0B"/>
-                </a:solidFill>
-                <a:latin typeface="Calibri"/>
-              </a:rPr>
-              <a:t>foundation type = i: ×0.46</a:t>
+              <a:rPr sz="1350" b="0" i="0">
+                <a:solidFill>
+                  <a:srgbClr val="52514E"/>
+                </a:solidFill>
+                <a:latin typeface="Calibri"/>
+              </a:rPr>
+              <a:t>of grade-3 buildings found in the top 10%</a:t>
             </a:r>
           </a:p>
           <a:p>
             <a:pPr algn="l">
               <a:spcAft>
-                <a:spcPts val="200"/>
+                <a:spcPts val="300"/>
               </a:spcAft>
             </a:pPr>
             <a:r>
-              <a:rPr sz="1400" b="0" i="0">
-                <a:solidFill>
-                  <a:srgbClr val="0B0B0B"/>
-                </a:solidFill>
-                <a:latin typeface="Calibri"/>
-              </a:rPr>
-              <a:t>roof type = x: ×0.50</a:t>
-            </a:r>
-          </a:p>
-          <a:p>
-            <a:pPr algn="l">
-              <a:spcAft>
-                <a:spcPts val="200"/>
-              </a:spcAft>
-            </a:pPr>
-            <a:r>
-              <a:rPr sz="1400" b="0" i="0">
-                <a:solidFill>
-                  <a:srgbClr val="0B0B0B"/>
-                </a:solidFill>
-                <a:latin typeface="Calibri"/>
-              </a:rPr>
-              <a:t>superstructure: cement mortar brick: ×0.63</a:t>
-            </a:r>
-          </a:p>
-        </p:txBody>
-      </p:sp>
-      <p:sp>
-        <p:nvSpPr>
-          <p:cNvPr id="11" name="Rounded Rectangle 10"/>
+              <a:rPr sz="1350" b="1" i="0">
+                <a:solidFill>
+                  <a:srgbClr val="142340"/>
+                </a:solidFill>
+                <a:latin typeface="Calibri"/>
+              </a:rPr>
+              <a:t>2.8× better than random</a:t>
+            </a:r>
+          </a:p>
+        </p:txBody>
+      </p:sp>
+      <p:sp>
+        <p:nvSpPr>
+          <p:cNvPr id="8" name="Rounded Rectangle 7"/>
           <p:cNvSpPr/>
           <p:nvPr/>
         </p:nvSpPr>
         <p:spPr>
           <a:xfrm>
-            <a:off x="6766560" y="4663440"/>
-            <a:ext cx="4892040" cy="1417320"/>
+            <a:off x="7589520" y="3017520"/>
+            <a:ext cx="4069080" cy="1298448"/>
           </a:xfrm>
           <a:prstGeom prst="roundRect">
             <a:avLst>
@@ -7093,7 +7209,7 @@
             </a:avLst>
           </a:prstGeom>
           <a:solidFill>
-            <a:srgbClr val="142340"/>
+            <a:srgbClr val="F1F5FB"/>
           </a:solidFill>
           <a:ln>
             <a:noFill/>
@@ -7124,14 +7240,14 @@
       </p:sp>
       <p:sp>
         <p:nvSpPr>
-          <p:cNvPr id="12" name="TextBox 11"/>
-          <p:cNvSpPr txBox="1"/>
-          <p:nvPr/>
-        </p:nvSpPr>
-        <p:spPr>
-          <a:xfrm>
-            <a:off x="6995160" y="4773168"/>
-            <a:ext cx="4480560" cy="320040"/>
+          <p:cNvPr id="9" name="TextBox 8"/>
+          <p:cNvSpPr txBox="1"/>
+          <p:nvPr/>
+        </p:nvSpPr>
+        <p:spPr>
+          <a:xfrm>
+            <a:off x="7818120" y="3154679"/>
+            <a:ext cx="1737360" cy="731520"/>
           </a:xfrm>
           <a:prstGeom prst="rect">
             <a:avLst/>
@@ -7146,27 +7262,27 @@
           <a:p>
             <a:pPr algn="l"/>
             <a:r>
-              <a:rPr sz="1600" b="1" i="0">
-                <a:solidFill>
-                  <a:srgbClr val="FFFFFF"/>
-                </a:solidFill>
-                <a:latin typeface="Calibri"/>
-              </a:rPr>
-              <a:t>In plain words: the material matters</a:t>
-            </a:r>
-          </a:p>
-        </p:txBody>
-      </p:sp>
-      <p:sp>
-        <p:nvSpPr>
-          <p:cNvPr id="13" name="TextBox 12"/>
-          <p:cNvSpPr txBox="1"/>
-          <p:nvPr/>
-        </p:nvSpPr>
-        <p:spPr>
-          <a:xfrm>
-            <a:off x="6995160" y="5138928"/>
-            <a:ext cx="4480560" cy="914400"/>
+              <a:rPr sz="4000" b="1" i="0">
+                <a:solidFill>
+                  <a:srgbClr val="EB6834"/>
+                </a:solidFill>
+                <a:latin typeface="Cambria"/>
+              </a:rPr>
+              <a:t>51%</a:t>
+            </a:r>
+          </a:p>
+        </p:txBody>
+      </p:sp>
+      <p:sp>
+        <p:nvSpPr>
+          <p:cNvPr id="10" name="TextBox 9"/>
+          <p:cNvSpPr txBox="1"/>
+          <p:nvPr/>
+        </p:nvSpPr>
+        <p:spPr>
+          <a:xfrm>
+            <a:off x="9555480" y="3200400"/>
+            <a:ext cx="2011680" cy="1005840"/>
           </a:xfrm>
           <a:prstGeom prst="rect">
             <a:avLst/>
@@ -7181,87 +7297,169 @@
           <a:p>
             <a:pPr algn="l">
               <a:spcAft>
-                <a:spcPts val="400"/>
+                <a:spcPts val="300"/>
               </a:spcAft>
             </a:pPr>
             <a:r>
-              <a:rPr sz="1400" b="0" i="0">
-                <a:solidFill>
-                  <a:srgbClr val="FFFFFF"/>
-                </a:solidFill>
-                <a:latin typeface="Calibri"/>
-              </a:rPr>
-              <a:t>Mud-mortar stone </a:t>
-            </a:r>
-            <a:r>
-              <a:rPr sz="1400" b="1" i="0">
-                <a:solidFill>
-                  <a:srgbClr val="EB6834"/>
-                </a:solidFill>
-                <a:latin typeface="Calibri"/>
-              </a:rPr>
-              <a:t>×1.38</a:t>
-            </a:r>
-            <a:r>
-              <a:rPr sz="1400" b="0" i="0">
-                <a:solidFill>
-                  <a:srgbClr val="FFFFFF"/>
-                </a:solidFill>
-                <a:latin typeface="Calibri"/>
-              </a:rPr>
-              <a:t>   Stone flag </a:t>
-            </a:r>
-            <a:r>
-              <a:rPr sz="1400" b="1" i="0">
-                <a:solidFill>
-                  <a:srgbClr val="EB6834"/>
-                </a:solidFill>
-                <a:latin typeface="Calibri"/>
-              </a:rPr>
-              <a:t>×1.31</a:t>
+              <a:rPr sz="1350" b="0" i="0">
+                <a:solidFill>
+                  <a:srgbClr val="52514E"/>
+                </a:solidFill>
+                <a:latin typeface="Calibri"/>
+              </a:rPr>
+              <a:t>of grade-3 buildings found in the top 20%</a:t>
             </a:r>
           </a:p>
           <a:p>
             <a:pPr algn="l">
               <a:spcAft>
-                <a:spcPts val="400"/>
+                <a:spcPts val="300"/>
               </a:spcAft>
             </a:pPr>
             <a:r>
-              <a:rPr sz="1400" b="0" i="0">
-                <a:solidFill>
-                  <a:srgbClr val="FFFFFF"/>
-                </a:solidFill>
-                <a:latin typeface="Calibri"/>
-              </a:rPr>
-              <a:t>Cement-mortar brick </a:t>
-            </a:r>
-            <a:r>
-              <a:rPr sz="1400" b="1" i="0">
-                <a:solidFill>
-                  <a:srgbClr val="86B6EF"/>
-                </a:solidFill>
-                <a:latin typeface="Calibri"/>
-              </a:rPr>
-              <a:t>×0.63</a:t>
-            </a:r>
-            <a:r>
-              <a:rPr sz="1400" b="0" i="0">
-                <a:solidFill>
-                  <a:srgbClr val="FFFFFF"/>
-                </a:solidFill>
-                <a:latin typeface="Calibri"/>
-              </a:rPr>
-              <a:t>   Engineered RC </a:t>
-            </a:r>
-            <a:r>
-              <a:rPr sz="1400" b="1" i="0">
-                <a:solidFill>
-                  <a:srgbClr val="86B6EF"/>
-                </a:solidFill>
-                <a:latin typeface="Calibri"/>
-              </a:rPr>
-              <a:t>×0.84</a:t>
+              <a:rPr sz="1350" b="1" i="0">
+                <a:solidFill>
+                  <a:srgbClr val="142340"/>
+                </a:solidFill>
+                <a:latin typeface="Calibri"/>
+              </a:rPr>
+              <a:t>2.5× better than random</a:t>
+            </a:r>
+          </a:p>
+        </p:txBody>
+      </p:sp>
+      <p:sp>
+        <p:nvSpPr>
+          <p:cNvPr id="11" name="Rounded Rectangle 10"/>
+          <p:cNvSpPr/>
+          <p:nvPr/>
+        </p:nvSpPr>
+        <p:spPr>
+          <a:xfrm>
+            <a:off x="7589520" y="4480560"/>
+            <a:ext cx="4069080" cy="1298448"/>
+          </a:xfrm>
+          <a:prstGeom prst="roundRect">
+            <a:avLst>
+              <a:gd name="adj" fmla="val 8000"/>
+            </a:avLst>
+          </a:prstGeom>
+          <a:solidFill>
+            <a:srgbClr val="F1F5FB"/>
+          </a:solidFill>
+          <a:ln>
+            <a:noFill/>
+          </a:ln>
+          <a:effectLst/>
+        </p:spPr>
+        <p:style>
+          <a:lnRef idx="1">
+            <a:schemeClr val="accent1"/>
+          </a:lnRef>
+          <a:fillRef idx="3">
+            <a:schemeClr val="accent1"/>
+          </a:fillRef>
+          <a:effectRef idx="2">
+            <a:schemeClr val="accent1"/>
+          </a:effectRef>
+          <a:fontRef idx="minor">
+            <a:schemeClr val="lt1"/>
+          </a:fontRef>
+        </p:style>
+        <p:txBody>
+          <a:bodyPr rtlCol="0" anchor="ctr"/>
+          <a:lstStyle/>
+          <a:p>
+            <a:pPr algn="ctr"/>
+          </a:p>
+        </p:txBody>
+      </p:sp>
+      <p:sp>
+        <p:nvSpPr>
+          <p:cNvPr id="12" name="TextBox 11"/>
+          <p:cNvSpPr txBox="1"/>
+          <p:nvPr/>
+        </p:nvSpPr>
+        <p:spPr>
+          <a:xfrm>
+            <a:off x="7818120" y="4617720"/>
+            <a:ext cx="1737360" cy="731520"/>
+          </a:xfrm>
+          <a:prstGeom prst="rect">
+            <a:avLst/>
+          </a:prstGeom>
+          <a:noFill/>
+        </p:spPr>
+        <p:txBody>
+          <a:bodyPr wrap="square" lIns="0" rIns="0" tIns="0" bIns="0" anchor="t">
+            <a:spAutoFit/>
+          </a:bodyPr>
+          <a:lstStyle/>
+          <a:p>
+            <a:pPr algn="l"/>
+            <a:r>
+              <a:rPr sz="4000" b="1" i="0">
+                <a:solidFill>
+                  <a:srgbClr val="EB6834"/>
+                </a:solidFill>
+                <a:latin typeface="Cambria"/>
+              </a:rPr>
+              <a:t>67%</a:t>
+            </a:r>
+          </a:p>
+        </p:txBody>
+      </p:sp>
+      <p:sp>
+        <p:nvSpPr>
+          <p:cNvPr id="13" name="TextBox 12"/>
+          <p:cNvSpPr txBox="1"/>
+          <p:nvPr/>
+        </p:nvSpPr>
+        <p:spPr>
+          <a:xfrm>
+            <a:off x="9555480" y="4663440"/>
+            <a:ext cx="2011680" cy="1005840"/>
+          </a:xfrm>
+          <a:prstGeom prst="rect">
+            <a:avLst/>
+          </a:prstGeom>
+          <a:noFill/>
+        </p:spPr>
+        <p:txBody>
+          <a:bodyPr wrap="square" lIns="0" rIns="0" tIns="0" bIns="0" anchor="t">
+            <a:spAutoFit/>
+          </a:bodyPr>
+          <a:lstStyle/>
+          <a:p>
+            <a:pPr algn="l">
+              <a:spcAft>
+                <a:spcPts val="300"/>
+              </a:spcAft>
+            </a:pPr>
+            <a:r>
+              <a:rPr sz="1350" b="0" i="0">
+                <a:solidFill>
+                  <a:srgbClr val="52514E"/>
+                </a:solidFill>
+                <a:latin typeface="Calibri"/>
+              </a:rPr>
+              <a:t>of grade-3 buildings found in the top 30%</a:t>
+            </a:r>
+          </a:p>
+          <a:p>
+            <a:pPr algn="l">
+              <a:spcAft>
+                <a:spcPts val="300"/>
+              </a:spcAft>
+            </a:pPr>
+            <a:r>
+              <a:rPr sz="1350" b="1" i="0">
+                <a:solidFill>
+                  <a:srgbClr val="142340"/>
+                </a:solidFill>
+                <a:latin typeface="Calibri"/>
+              </a:rPr>
+              <a:t>2.2× better than random</a:t>
             </a:r>
           </a:p>
         </p:txBody>
@@ -7274,8 +7472,8 @@
         </p:nvSpPr>
         <p:spPr>
           <a:xfrm>
-            <a:off x="6766560" y="6144768"/>
-            <a:ext cx="4892040" cy="228600"/>
+            <a:off x="7589520" y="5943600"/>
+            <a:ext cx="4069080" cy="365760"/>
           </a:xfrm>
           <a:prstGeom prst="rect">
             <a:avLst/>
@@ -7290,13 +7488,13 @@
           <a:p>
             <a:pPr algn="l"/>
             <a:r>
-              <a:rPr sz="1050" b="0" i="0">
+              <a:rPr sz="1200" b="0" i="0">
                 <a:solidFill>
                   <a:srgbClr val="8A8984"/>
                 </a:solidFill>
                 <a:latin typeface="Calibri"/>
               </a:rPr>
-              <a:t>Odds ratios from the final model; flags in &lt;1% of buildings and location excluded.</a:t>
+              <a:t>HistGradientBoosting (final model); grade-3 ROC-AUC = 0.875</a:t>
             </a:r>
           </a:p>
         </p:txBody>
@@ -7331,7 +7529,7 @@
                 </a:solidFill>
                 <a:latin typeface="Calibri"/>
               </a:rPr>
-              <a:t>Group [XX]  ·  Earthquake damage prediction with logistic regression</a:t>
+              <a:t>Group [XX]  ·  Earthquake damage prediction: logistic regression, random forest, gradient boosting</a:t>
             </a:r>
           </a:p>
         </p:txBody>
@@ -7427,7 +7625,7 @@
                 </a:solidFill>
                 <a:latin typeface="Calibri"/>
               </a:rPr>
-              <a:t>SUMMARY OF PROJECT ACHIEVEMENTS</a:t>
+              <a:t>EXPERIMENTAL STUDY AND ANALYSIS</a:t>
             </a:r>
           </a:p>
         </p:txBody>
@@ -7462,21 +7660,139 @@
                 </a:solidFill>
                 <a:latin typeface="Cambria"/>
               </a:rPr>
-              <a:t>What we delivered</a:t>
-            </a:r>
-          </a:p>
-        </p:txBody>
-      </p:sp>
-      <p:sp>
-        <p:nvSpPr>
-          <p:cNvPr id="4" name="Rounded Rectangle 3"/>
+              <a:t>What drives the predictions?</a:t>
+            </a:r>
+          </a:p>
+        </p:txBody>
+      </p:sp>
+      <p:sp>
+        <p:nvSpPr>
+          <p:cNvPr id="4" name="TextBox 3"/>
+          <p:cNvSpPr txBox="1"/>
+          <p:nvPr/>
+        </p:nvSpPr>
+        <p:spPr>
+          <a:xfrm>
+            <a:off x="548640" y="1371600"/>
+            <a:ext cx="5486400" cy="320040"/>
+          </a:xfrm>
+          <a:prstGeom prst="rect">
+            <a:avLst/>
+          </a:prstGeom>
+          <a:noFill/>
+        </p:spPr>
+        <p:txBody>
+          <a:bodyPr wrap="square" lIns="0" rIns="0" tIns="0" bIns="0" anchor="t">
+            <a:spAutoFit/>
+          </a:bodyPr>
+          <a:lstStyle/>
+          <a:p>
+            <a:pPr algn="l"/>
+            <a:r>
+              <a:rPr sz="1500" b="1" i="0">
+                <a:solidFill>
+                  <a:srgbClr val="142340"/>
+                </a:solidFill>
+                <a:latin typeface="Calibri"/>
+              </a:rPr>
+              <a:t>Logistic regression: odds ratios for grade 3</a:t>
+            </a:r>
+          </a:p>
+        </p:txBody>
+      </p:sp>
+      <p:pic>
+        <p:nvPicPr>
+          <p:cNvPr id="5" name="Picture 4" descr="fig11b_coefficients_slide.png"/>
+          <p:cNvPicPr>
+            <a:picLocks noChangeAspect="1"/>
+          </p:cNvPicPr>
+          <p:nvPr/>
+        </p:nvPicPr>
+        <p:blipFill>
+          <a:blip r:embed="rId2"/>
+          <a:stretch>
+            <a:fillRect/>
+          </a:stretch>
+        </p:blipFill>
+        <p:spPr>
+          <a:xfrm>
+            <a:off x="457200" y="1988594"/>
+            <a:ext cx="5486400" cy="3703771"/>
+          </a:xfrm>
+          <a:prstGeom prst="rect">
+            <a:avLst/>
+          </a:prstGeom>
+        </p:spPr>
+      </p:pic>
+      <p:sp>
+        <p:nvSpPr>
+          <p:cNvPr id="6" name="TextBox 5"/>
+          <p:cNvSpPr txBox="1"/>
+          <p:nvPr/>
+        </p:nvSpPr>
+        <p:spPr>
+          <a:xfrm>
+            <a:off x="6309360" y="1371600"/>
+            <a:ext cx="5394960" cy="320040"/>
+          </a:xfrm>
+          <a:prstGeom prst="rect">
+            <a:avLst/>
+          </a:prstGeom>
+          <a:noFill/>
+        </p:spPr>
+        <p:txBody>
+          <a:bodyPr wrap="square" lIns="0" rIns="0" tIns="0" bIns="0" anchor="t">
+            <a:spAutoFit/>
+          </a:bodyPr>
+          <a:lstStyle/>
+          <a:p>
+            <a:pPr algn="l"/>
+            <a:r>
+              <a:rPr sz="1500" b="1" i="0">
+                <a:solidFill>
+                  <a:srgbClr val="142340"/>
+                </a:solidFill>
+                <a:latin typeface="Calibri"/>
+              </a:rPr>
+              <a:t>All three models: permutation importance</a:t>
+            </a:r>
+          </a:p>
+        </p:txBody>
+      </p:sp>
+      <p:pic>
+        <p:nvPicPr>
+          <p:cNvPr id="7" name="Picture 6" descr="fig16b_importance_slide.png"/>
+          <p:cNvPicPr>
+            <a:picLocks noChangeAspect="1"/>
+          </p:cNvPicPr>
+          <p:nvPr/>
+        </p:nvPicPr>
+        <p:blipFill>
+          <a:blip r:embed="rId3"/>
+          <a:stretch>
+            <a:fillRect/>
+          </a:stretch>
+        </p:blipFill>
+        <p:spPr>
+          <a:xfrm>
+            <a:off x="6217920" y="1930388"/>
+            <a:ext cx="5486400" cy="3820182"/>
+          </a:xfrm>
+          <a:prstGeom prst="rect">
+            <a:avLst/>
+          </a:prstGeom>
+        </p:spPr>
+      </p:pic>
+      <p:sp>
+        <p:nvSpPr>
+          <p:cNvPr id="8" name="Rounded Rectangle 7"/>
           <p:cNvSpPr/>
           <p:nvPr/>
         </p:nvSpPr>
         <p:spPr>
           <a:xfrm>
-            <a:off x="548640" y="1600200"/>
-            <a:ext cx="3566160" cy="2103120"/>
+            <a:off x="548640" y="5943600"/>
+            <a:ext cx="11109960" cy="384048"/>
           </a:xfrm>
           <a:prstGeom prst="roundRect">
             <a:avLst>
@@ -7515,14 +7831,14 @@
       </p:sp>
       <p:sp>
         <p:nvSpPr>
-          <p:cNvPr id="5" name="TextBox 4"/>
-          <p:cNvSpPr txBox="1"/>
-          <p:nvPr/>
-        </p:nvSpPr>
-        <p:spPr>
-          <a:xfrm>
-            <a:off x="822959" y="1783080"/>
-            <a:ext cx="3108960" cy="731520"/>
+          <p:cNvPr id="9" name="TextBox 8"/>
+          <p:cNvSpPr txBox="1"/>
+          <p:nvPr/>
+        </p:nvSpPr>
+        <p:spPr>
+          <a:xfrm>
+            <a:off x="731520" y="5980176"/>
+            <a:ext cx="10789920" cy="320040"/>
           </a:xfrm>
           <a:prstGeom prst="rect">
             <a:avLst/>
@@ -7537,75 +7853,23 @@
           <a:p>
             <a:pPr algn="l"/>
             <a:r>
-              <a:rPr sz="3600" b="1" i="0">
+              <a:rPr sz="1300" b="0" i="0">
+                <a:solidFill>
+                  <a:srgbClr val="52514E"/>
+                </a:solidFill>
+                <a:latin typeface="Calibri"/>
+              </a:rPr>
+              <a:t>Mud-mortar stone </a:t>
+            </a:r>
+            <a:r>
+              <a:rPr sz="1300" b="1" i="0">
                 <a:solidFill>
                   <a:srgbClr val="EB6834"/>
                 </a:solidFill>
-                <a:latin typeface="Cambria"/>
-              </a:rPr>
-              <a:t>0.740</a:t>
-            </a:r>
-          </a:p>
-        </p:txBody>
-      </p:sp>
-      <p:sp>
-        <p:nvSpPr>
-          <p:cNvPr id="6" name="TextBox 5"/>
-          <p:cNvSpPr txBox="1"/>
-          <p:nvPr/>
-        </p:nvSpPr>
-        <p:spPr>
-          <a:xfrm>
-            <a:off x="822959" y="2514600"/>
-            <a:ext cx="3108960" cy="365760"/>
-          </a:xfrm>
-          <a:prstGeom prst="rect">
-            <a:avLst/>
-          </a:prstGeom>
-          <a:noFill/>
-        </p:spPr>
-        <p:txBody>
-          <a:bodyPr wrap="square" lIns="0" rIns="0" tIns="0" bIns="0" anchor="t">
-            <a:spAutoFit/>
-          </a:bodyPr>
-          <a:lstStyle/>
-          <a:p>
-            <a:pPr algn="l"/>
-            <a:r>
-              <a:rPr sz="1600" b="1" i="0">
-                <a:solidFill>
-                  <a:srgbClr val="142340"/>
-                </a:solidFill>
-                <a:latin typeface="Calibri"/>
-              </a:rPr>
-              <a:t>holdout micro-F1</a:t>
-            </a:r>
-          </a:p>
-        </p:txBody>
-      </p:sp>
-      <p:sp>
-        <p:nvSpPr>
-          <p:cNvPr id="7" name="TextBox 6"/>
-          <p:cNvSpPr txBox="1"/>
-          <p:nvPr/>
-        </p:nvSpPr>
-        <p:spPr>
-          <a:xfrm>
-            <a:off x="822959" y="2926080"/>
-            <a:ext cx="3108960" cy="731520"/>
-          </a:xfrm>
-          <a:prstGeom prst="rect">
-            <a:avLst/>
-          </a:prstGeom>
-          <a:noFill/>
-        </p:spPr>
-        <p:txBody>
-          <a:bodyPr wrap="square" lIns="0" rIns="0" tIns="0" bIns="0" anchor="t">
-            <a:spAutoFit/>
-          </a:bodyPr>
-          <a:lstStyle/>
-          <a:p>
-            <a:pPr algn="l"/>
+                <a:latin typeface="Calibri"/>
+              </a:rPr>
+              <a:t>×1.38</a:t>
+            </a:r>
             <a:r>
               <a:rPr sz="1300" b="0" i="0">
                 <a:solidFill>
@@ -7613,88 +7877,25 @@
                 </a:solidFill>
                 <a:latin typeface="Calibri"/>
               </a:rPr>
-              <a:t>vs 0.569 for the majority baseline (+17.2 pp)</a:t>
-            </a:r>
-          </a:p>
-        </p:txBody>
-      </p:sp>
-      <p:sp>
-        <p:nvSpPr>
-          <p:cNvPr id="8" name="Rounded Rectangle 7"/>
-          <p:cNvSpPr/>
-          <p:nvPr/>
-        </p:nvSpPr>
-        <p:spPr>
-          <a:xfrm>
-            <a:off x="4315968" y="1600200"/>
-            <a:ext cx="3566160" cy="2103120"/>
-          </a:xfrm>
-          <a:prstGeom prst="roundRect">
-            <a:avLst>
-              <a:gd name="adj" fmla="val 8000"/>
-            </a:avLst>
-          </a:prstGeom>
-          <a:solidFill>
-            <a:srgbClr val="F1F5FB"/>
-          </a:solidFill>
-          <a:ln>
-            <a:noFill/>
-          </a:ln>
-          <a:effectLst/>
-        </p:spPr>
-        <p:style>
-          <a:lnRef idx="1">
-            <a:schemeClr val="accent1"/>
-          </a:lnRef>
-          <a:fillRef idx="3">
-            <a:schemeClr val="accent1"/>
-          </a:fillRef>
-          <a:effectRef idx="2">
-            <a:schemeClr val="accent1"/>
-          </a:effectRef>
-          <a:fontRef idx="minor">
-            <a:schemeClr val="lt1"/>
-          </a:fontRef>
-        </p:style>
-        <p:txBody>
-          <a:bodyPr rtlCol="0" anchor="ctr"/>
-          <a:lstStyle/>
-          <a:p>
-            <a:pPr algn="ctr"/>
-          </a:p>
-        </p:txBody>
-      </p:sp>
-      <p:sp>
-        <p:nvSpPr>
-          <p:cNvPr id="9" name="TextBox 8"/>
-          <p:cNvSpPr txBox="1"/>
-          <p:nvPr/>
-        </p:nvSpPr>
-        <p:spPr>
-          <a:xfrm>
-            <a:off x="4590288" y="1783080"/>
-            <a:ext cx="3108960" cy="731520"/>
-          </a:xfrm>
-          <a:prstGeom prst="rect">
-            <a:avLst/>
-          </a:prstGeom>
-          <a:noFill/>
-        </p:spPr>
-        <p:txBody>
-          <a:bodyPr wrap="square" lIns="0" rIns="0" tIns="0" bIns="0" anchor="t">
-            <a:spAutoFit/>
-          </a:bodyPr>
-          <a:lstStyle/>
-          <a:p>
-            <a:pPr algn="l"/>
-            <a:r>
-              <a:rPr sz="3600" b="1" i="0">
-                <a:solidFill>
-                  <a:srgbClr val="EB6834"/>
-                </a:solidFill>
-                <a:latin typeface="Cambria"/>
-              </a:rPr>
-              <a:t>50%</a:t>
+              <a:t>   Engineered RC </a:t>
+            </a:r>
+            <a:r>
+              <a:rPr sz="1300" b="1" i="0">
+                <a:solidFill>
+                  <a:srgbClr val="104281"/>
+                </a:solidFill>
+                <a:latin typeface="Calibri"/>
+              </a:rPr>
+              <a:t>×0.84</a:t>
+            </a:r>
+            <a:r>
+              <a:rPr sz="1300" b="0" i="0">
+                <a:solidFill>
+                  <a:srgbClr val="52514E"/>
+                </a:solidFill>
+                <a:latin typeface="Calibri"/>
+              </a:rPr>
+              <a:t>   ·   location ranks first for every model; trees say how much, LR also says which direction</a:t>
             </a:r>
           </a:p>
         </p:txBody>
@@ -7702,680 +7903,6 @@
       <p:sp>
         <p:nvSpPr>
           <p:cNvPr id="10" name="TextBox 9"/>
-          <p:cNvSpPr txBox="1"/>
-          <p:nvPr/>
-        </p:nvSpPr>
-        <p:spPr>
-          <a:xfrm>
-            <a:off x="4590288" y="2514600"/>
-            <a:ext cx="3108960" cy="365760"/>
-          </a:xfrm>
-          <a:prstGeom prst="rect">
-            <a:avLst/>
-          </a:prstGeom>
-          <a:noFill/>
-        </p:spPr>
-        <p:txBody>
-          <a:bodyPr wrap="square" lIns="0" rIns="0" tIns="0" bIns="0" anchor="t">
-            <a:spAutoFit/>
-          </a:bodyPr>
-          <a:lstStyle/>
-          <a:p>
-            <a:pPr algn="l"/>
-            <a:r>
-              <a:rPr sz="1600" b="1" i="0">
-                <a:solidFill>
-                  <a:srgbClr val="142340"/>
-                </a:solidFill>
-                <a:latin typeface="Calibri"/>
-              </a:rPr>
-              <a:t>of destroyed buildings</a:t>
-            </a:r>
-          </a:p>
-        </p:txBody>
-      </p:sp>
-      <p:sp>
-        <p:nvSpPr>
-          <p:cNvPr id="11" name="TextBox 10"/>
-          <p:cNvSpPr txBox="1"/>
-          <p:nvPr/>
-        </p:nvSpPr>
-        <p:spPr>
-          <a:xfrm>
-            <a:off x="4590288" y="2926080"/>
-            <a:ext cx="3108960" cy="731520"/>
-          </a:xfrm>
-          <a:prstGeom prst="rect">
-            <a:avLst/>
-          </a:prstGeom>
-          <a:noFill/>
-        </p:spPr>
-        <p:txBody>
-          <a:bodyPr wrap="square" lIns="0" rIns="0" tIns="0" bIns="0" anchor="t">
-            <a:spAutoFit/>
-          </a:bodyPr>
-          <a:lstStyle/>
-          <a:p>
-            <a:pPr algn="l"/>
-            <a:r>
-              <a:rPr sz="1300" b="0" i="0">
-                <a:solidFill>
-                  <a:srgbClr val="52514E"/>
-                </a:solidFill>
-                <a:latin typeface="Calibri"/>
-              </a:rPr>
-              <a:t>found by inspecting just the top 20% of the ranked list</a:t>
-            </a:r>
-          </a:p>
-        </p:txBody>
-      </p:sp>
-      <p:sp>
-        <p:nvSpPr>
-          <p:cNvPr id="12" name="Rounded Rectangle 11"/>
-          <p:cNvSpPr/>
-          <p:nvPr/>
-        </p:nvSpPr>
-        <p:spPr>
-          <a:xfrm>
-            <a:off x="8083296" y="1600200"/>
-            <a:ext cx="3566160" cy="2103120"/>
-          </a:xfrm>
-          <a:prstGeom prst="roundRect">
-            <a:avLst>
-              <a:gd name="adj" fmla="val 8000"/>
-            </a:avLst>
-          </a:prstGeom>
-          <a:solidFill>
-            <a:srgbClr val="F1F5FB"/>
-          </a:solidFill>
-          <a:ln>
-            <a:noFill/>
-          </a:ln>
-          <a:effectLst/>
-        </p:spPr>
-        <p:style>
-          <a:lnRef idx="1">
-            <a:schemeClr val="accent1"/>
-          </a:lnRef>
-          <a:fillRef idx="3">
-            <a:schemeClr val="accent1"/>
-          </a:fillRef>
-          <a:effectRef idx="2">
-            <a:schemeClr val="accent1"/>
-          </a:effectRef>
-          <a:fontRef idx="minor">
-            <a:schemeClr val="lt1"/>
-          </a:fontRef>
-        </p:style>
-        <p:txBody>
-          <a:bodyPr rtlCol="0" anchor="ctr"/>
-          <a:lstStyle/>
-          <a:p>
-            <a:pPr algn="ctr"/>
-          </a:p>
-        </p:txBody>
-      </p:sp>
-      <p:sp>
-        <p:nvSpPr>
-          <p:cNvPr id="13" name="TextBox 12"/>
-          <p:cNvSpPr txBox="1"/>
-          <p:nvPr/>
-        </p:nvSpPr>
-        <p:spPr>
-          <a:xfrm>
-            <a:off x="8357616" y="1783080"/>
-            <a:ext cx="3108960" cy="731520"/>
-          </a:xfrm>
-          <a:prstGeom prst="rect">
-            <a:avLst/>
-          </a:prstGeom>
-          <a:noFill/>
-        </p:spPr>
-        <p:txBody>
-          <a:bodyPr wrap="square" lIns="0" rIns="0" tIns="0" bIns="0" anchor="t">
-            <a:spAutoFit/>
-          </a:bodyPr>
-          <a:lstStyle/>
-          <a:p>
-            <a:pPr algn="l"/>
-            <a:r>
-              <a:rPr sz="3600" b="1" i="0">
-                <a:solidFill>
-                  <a:srgbClr val="142340"/>
-                </a:solidFill>
-                <a:latin typeface="Cambria"/>
-              </a:rPr>
-              <a:t>+6.3 pp</a:t>
-            </a:r>
-          </a:p>
-        </p:txBody>
-      </p:sp>
-      <p:sp>
-        <p:nvSpPr>
-          <p:cNvPr id="14" name="TextBox 13"/>
-          <p:cNvSpPr txBox="1"/>
-          <p:nvPr/>
-        </p:nvSpPr>
-        <p:spPr>
-          <a:xfrm>
-            <a:off x="8357616" y="2514600"/>
-            <a:ext cx="3108960" cy="365760"/>
-          </a:xfrm>
-          <a:prstGeom prst="rect">
-            <a:avLst/>
-          </a:prstGeom>
-          <a:noFill/>
-        </p:spPr>
-        <p:txBody>
-          <a:bodyPr wrap="square" lIns="0" rIns="0" tIns="0" bIns="0" anchor="t">
-            <a:spAutoFit/>
-          </a:bodyPr>
-          <a:lstStyle/>
-          <a:p>
-            <a:pPr algn="l"/>
-            <a:r>
-              <a:rPr sz="1600" b="1" i="0">
-                <a:solidFill>
-                  <a:srgbClr val="142340"/>
-                </a:solidFill>
-                <a:latin typeface="Calibri"/>
-              </a:rPr>
-              <a:t>from geo target encoding</a:t>
-            </a:r>
-          </a:p>
-        </p:txBody>
-      </p:sp>
-      <p:sp>
-        <p:nvSpPr>
-          <p:cNvPr id="15" name="TextBox 14"/>
-          <p:cNvSpPr txBox="1"/>
-          <p:nvPr/>
-        </p:nvSpPr>
-        <p:spPr>
-          <a:xfrm>
-            <a:off x="8357616" y="2926080"/>
-            <a:ext cx="3108960" cy="731520"/>
-          </a:xfrm>
-          <a:prstGeom prst="rect">
-            <a:avLst/>
-          </a:prstGeom>
-          <a:noFill/>
-        </p:spPr>
-        <p:txBody>
-          <a:bodyPr wrap="square" lIns="0" rIns="0" tIns="0" bIns="0" anchor="t">
-            <a:spAutoFit/>
-          </a:bodyPr>
-          <a:lstStyle/>
-          <a:p>
-            <a:pPr algn="l"/>
-            <a:r>
-              <a:rPr sz="1300" b="0" i="0">
-                <a:solidFill>
-                  <a:srgbClr val="52514E"/>
-                </a:solidFill>
-                <a:latin typeface="Calibri"/>
-              </a:rPr>
-              <a:t>leakage-safe encoding of 11,595 villages</a:t>
-            </a:r>
-          </a:p>
-        </p:txBody>
-      </p:sp>
-      <p:sp>
-        <p:nvSpPr>
-          <p:cNvPr id="16" name="Rounded Rectangle 15"/>
-          <p:cNvSpPr/>
-          <p:nvPr/>
-        </p:nvSpPr>
-        <p:spPr>
-          <a:xfrm>
-            <a:off x="548640" y="3931920"/>
-            <a:ext cx="3566160" cy="2103120"/>
-          </a:xfrm>
-          <a:prstGeom prst="roundRect">
-            <a:avLst>
-              <a:gd name="adj" fmla="val 8000"/>
-            </a:avLst>
-          </a:prstGeom>
-          <a:solidFill>
-            <a:srgbClr val="F1F5FB"/>
-          </a:solidFill>
-          <a:ln>
-            <a:noFill/>
-          </a:ln>
-          <a:effectLst/>
-        </p:spPr>
-        <p:style>
-          <a:lnRef idx="1">
-            <a:schemeClr val="accent1"/>
-          </a:lnRef>
-          <a:fillRef idx="3">
-            <a:schemeClr val="accent1"/>
-          </a:fillRef>
-          <a:effectRef idx="2">
-            <a:schemeClr val="accent1"/>
-          </a:effectRef>
-          <a:fontRef idx="minor">
-            <a:schemeClr val="lt1"/>
-          </a:fontRef>
-        </p:style>
-        <p:txBody>
-          <a:bodyPr rtlCol="0" anchor="ctr"/>
-          <a:lstStyle/>
-          <a:p>
-            <a:pPr algn="ctr"/>
-          </a:p>
-        </p:txBody>
-      </p:sp>
-      <p:sp>
-        <p:nvSpPr>
-          <p:cNvPr id="17" name="TextBox 16"/>
-          <p:cNvSpPr txBox="1"/>
-          <p:nvPr/>
-        </p:nvSpPr>
-        <p:spPr>
-          <a:xfrm>
-            <a:off x="822959" y="4114800"/>
-            <a:ext cx="3108960" cy="731520"/>
-          </a:xfrm>
-          <a:prstGeom prst="rect">
-            <a:avLst/>
-          </a:prstGeom>
-          <a:noFill/>
-        </p:spPr>
-        <p:txBody>
-          <a:bodyPr wrap="square" lIns="0" rIns="0" tIns="0" bIns="0" anchor="t">
-            <a:spAutoFit/>
-          </a:bodyPr>
-          <a:lstStyle/>
-          <a:p>
-            <a:pPr algn="l"/>
-            <a:r>
-              <a:rPr sz="3600" b="1" i="0">
-                <a:solidFill>
-                  <a:srgbClr val="142340"/>
-                </a:solidFill>
-                <a:latin typeface="Cambria"/>
-              </a:rPr>
-              <a:t>0</a:t>
-            </a:r>
-          </a:p>
-        </p:txBody>
-      </p:sp>
-      <p:sp>
-        <p:nvSpPr>
-          <p:cNvPr id="18" name="TextBox 17"/>
-          <p:cNvSpPr txBox="1"/>
-          <p:nvPr/>
-        </p:nvSpPr>
-        <p:spPr>
-          <a:xfrm>
-            <a:off x="822959" y="4846320"/>
-            <a:ext cx="3108960" cy="365760"/>
-          </a:xfrm>
-          <a:prstGeom prst="rect">
-            <a:avLst/>
-          </a:prstGeom>
-          <a:noFill/>
-        </p:spPr>
-        <p:txBody>
-          <a:bodyPr wrap="square" lIns="0" rIns="0" tIns="0" bIns="0" anchor="t">
-            <a:spAutoFit/>
-          </a:bodyPr>
-          <a:lstStyle/>
-          <a:p>
-            <a:pPr algn="l"/>
-            <a:r>
-              <a:rPr sz="1600" b="1" i="0">
-                <a:solidFill>
-                  <a:srgbClr val="142340"/>
-                </a:solidFill>
-                <a:latin typeface="Calibri"/>
-              </a:rPr>
-              <a:t>leakage paths</a:t>
-            </a:r>
-          </a:p>
-        </p:txBody>
-      </p:sp>
-      <p:sp>
-        <p:nvSpPr>
-          <p:cNvPr id="19" name="TextBox 18"/>
-          <p:cNvSpPr txBox="1"/>
-          <p:nvPr/>
-        </p:nvSpPr>
-        <p:spPr>
-          <a:xfrm>
-            <a:off x="822959" y="5257800"/>
-            <a:ext cx="3108960" cy="731520"/>
-          </a:xfrm>
-          <a:prstGeom prst="rect">
-            <a:avLst/>
-          </a:prstGeom>
-          <a:noFill/>
-        </p:spPr>
-        <p:txBody>
-          <a:bodyPr wrap="square" lIns="0" rIns="0" tIns="0" bIns="0" anchor="t">
-            <a:spAutoFit/>
-          </a:bodyPr>
-          <a:lstStyle/>
-          <a:p>
-            <a:pPr algn="l"/>
-            <a:r>
-              <a:rPr sz="1300" b="0" i="0">
-                <a:solidFill>
-                  <a:srgbClr val="52514E"/>
-                </a:solidFill>
-                <a:latin typeface="Calibri"/>
-              </a:rPr>
-              <a:t>all preprocessing inside one pipeline; holdout scored exactly once</a:t>
-            </a:r>
-          </a:p>
-        </p:txBody>
-      </p:sp>
-      <p:sp>
-        <p:nvSpPr>
-          <p:cNvPr id="20" name="Rounded Rectangle 19"/>
-          <p:cNvSpPr/>
-          <p:nvPr/>
-        </p:nvSpPr>
-        <p:spPr>
-          <a:xfrm>
-            <a:off x="4315968" y="3931920"/>
-            <a:ext cx="3566160" cy="2103120"/>
-          </a:xfrm>
-          <a:prstGeom prst="roundRect">
-            <a:avLst>
-              <a:gd name="adj" fmla="val 8000"/>
-            </a:avLst>
-          </a:prstGeom>
-          <a:solidFill>
-            <a:srgbClr val="F1F5FB"/>
-          </a:solidFill>
-          <a:ln>
-            <a:noFill/>
-          </a:ln>
-          <a:effectLst/>
-        </p:spPr>
-        <p:style>
-          <a:lnRef idx="1">
-            <a:schemeClr val="accent1"/>
-          </a:lnRef>
-          <a:fillRef idx="3">
-            <a:schemeClr val="accent1"/>
-          </a:fillRef>
-          <a:effectRef idx="2">
-            <a:schemeClr val="accent1"/>
-          </a:effectRef>
-          <a:fontRef idx="minor">
-            <a:schemeClr val="lt1"/>
-          </a:fontRef>
-        </p:style>
-        <p:txBody>
-          <a:bodyPr rtlCol="0" anchor="ctr"/>
-          <a:lstStyle/>
-          <a:p>
-            <a:pPr algn="ctr"/>
-          </a:p>
-        </p:txBody>
-      </p:sp>
-      <p:sp>
-        <p:nvSpPr>
-          <p:cNvPr id="21" name="TextBox 20"/>
-          <p:cNvSpPr txBox="1"/>
-          <p:nvPr/>
-        </p:nvSpPr>
-        <p:spPr>
-          <a:xfrm>
-            <a:off x="4590288" y="4114800"/>
-            <a:ext cx="3108960" cy="731520"/>
-          </a:xfrm>
-          <a:prstGeom prst="rect">
-            <a:avLst/>
-          </a:prstGeom>
-          <a:noFill/>
-        </p:spPr>
-        <p:txBody>
-          <a:bodyPr wrap="square" lIns="0" rIns="0" tIns="0" bIns="0" anchor="t">
-            <a:spAutoFit/>
-          </a:bodyPr>
-          <a:lstStyle/>
-          <a:p>
-            <a:pPr algn="l"/>
-            <a:r>
-              <a:rPr sz="3600" b="1" i="0">
-                <a:solidFill>
-                  <a:srgbClr val="142340"/>
-                </a:solidFill>
-                <a:latin typeface="Cambria"/>
-              </a:rPr>
-              <a:t>7</a:t>
-            </a:r>
-          </a:p>
-        </p:txBody>
-      </p:sp>
-      <p:sp>
-        <p:nvSpPr>
-          <p:cNvPr id="22" name="TextBox 21"/>
-          <p:cNvSpPr txBox="1"/>
-          <p:nvPr/>
-        </p:nvSpPr>
-        <p:spPr>
-          <a:xfrm>
-            <a:off x="4590288" y="4846320"/>
-            <a:ext cx="3108960" cy="365760"/>
-          </a:xfrm>
-          <a:prstGeom prst="rect">
-            <a:avLst/>
-          </a:prstGeom>
-          <a:noFill/>
-        </p:spPr>
-        <p:txBody>
-          <a:bodyPr wrap="square" lIns="0" rIns="0" tIns="0" bIns="0" anchor="t">
-            <a:spAutoFit/>
-          </a:bodyPr>
-          <a:lstStyle/>
-          <a:p>
-            <a:pPr algn="l"/>
-            <a:r>
-              <a:rPr sz="1600" b="1" i="0">
-                <a:solidFill>
-                  <a:srgbClr val="142340"/>
-                </a:solidFill>
-                <a:latin typeface="Calibri"/>
-              </a:rPr>
-              <a:t>controlled experiments</a:t>
-            </a:r>
-          </a:p>
-        </p:txBody>
-      </p:sp>
-      <p:sp>
-        <p:nvSpPr>
-          <p:cNvPr id="23" name="TextBox 22"/>
-          <p:cNvSpPr txBox="1"/>
-          <p:nvPr/>
-        </p:nvSpPr>
-        <p:spPr>
-          <a:xfrm>
-            <a:off x="4590288" y="5257800"/>
-            <a:ext cx="3108960" cy="731520"/>
-          </a:xfrm>
-          <a:prstGeom prst="rect">
-            <a:avLst/>
-          </a:prstGeom>
-          <a:noFill/>
-        </p:spPr>
-        <p:txBody>
-          <a:bodyPr wrap="square" lIns="0" rIns="0" tIns="0" bIns="0" anchor="t">
-            <a:spAutoFit/>
-          </a:bodyPr>
-          <a:lstStyle/>
-          <a:p>
-            <a:pPr algn="l"/>
-            <a:r>
-              <a:rPr sz="1300" b="0" i="0">
-                <a:solidFill>
-                  <a:srgbClr val="52514E"/>
-                </a:solidFill>
-                <a:latin typeface="Calibri"/>
-              </a:rPr>
-              <a:t>incl. an honest negative result for the ordinal model</a:t>
-            </a:r>
-          </a:p>
-        </p:txBody>
-      </p:sp>
-      <p:sp>
-        <p:nvSpPr>
-          <p:cNvPr id="24" name="Rounded Rectangle 23"/>
-          <p:cNvSpPr/>
-          <p:nvPr/>
-        </p:nvSpPr>
-        <p:spPr>
-          <a:xfrm>
-            <a:off x="8083296" y="3931920"/>
-            <a:ext cx="3566160" cy="2103120"/>
-          </a:xfrm>
-          <a:prstGeom prst="roundRect">
-            <a:avLst>
-              <a:gd name="adj" fmla="val 8000"/>
-            </a:avLst>
-          </a:prstGeom>
-          <a:solidFill>
-            <a:srgbClr val="F1F5FB"/>
-          </a:solidFill>
-          <a:ln>
-            <a:noFill/>
-          </a:ln>
-          <a:effectLst/>
-        </p:spPr>
-        <p:style>
-          <a:lnRef idx="1">
-            <a:schemeClr val="accent1"/>
-          </a:lnRef>
-          <a:fillRef idx="3">
-            <a:schemeClr val="accent1"/>
-          </a:fillRef>
-          <a:effectRef idx="2">
-            <a:schemeClr val="accent1"/>
-          </a:effectRef>
-          <a:fontRef idx="minor">
-            <a:schemeClr val="lt1"/>
-          </a:fontRef>
-        </p:style>
-        <p:txBody>
-          <a:bodyPr rtlCol="0" anchor="ctr"/>
-          <a:lstStyle/>
-          <a:p>
-            <a:pPr algn="ctr"/>
-          </a:p>
-        </p:txBody>
-      </p:sp>
-      <p:sp>
-        <p:nvSpPr>
-          <p:cNvPr id="25" name="TextBox 24"/>
-          <p:cNvSpPr txBox="1"/>
-          <p:nvPr/>
-        </p:nvSpPr>
-        <p:spPr>
-          <a:xfrm>
-            <a:off x="8357616" y="4114800"/>
-            <a:ext cx="3108960" cy="731520"/>
-          </a:xfrm>
-          <a:prstGeom prst="rect">
-            <a:avLst/>
-          </a:prstGeom>
-          <a:noFill/>
-        </p:spPr>
-        <p:txBody>
-          <a:bodyPr wrap="square" lIns="0" rIns="0" tIns="0" bIns="0" anchor="t">
-            <a:spAutoFit/>
-          </a:bodyPr>
-          <a:lstStyle/>
-          <a:p>
-            <a:pPr algn="l"/>
-            <a:r>
-              <a:rPr sz="3600" b="1" i="0">
-                <a:solidFill>
-                  <a:srgbClr val="142340"/>
-                </a:solidFill>
-                <a:latin typeface="Cambria"/>
-              </a:rPr>
-              <a:t>1</a:t>
-            </a:r>
-          </a:p>
-        </p:txBody>
-      </p:sp>
-      <p:sp>
-        <p:nvSpPr>
-          <p:cNvPr id="26" name="TextBox 25"/>
-          <p:cNvSpPr txBox="1"/>
-          <p:nvPr/>
-        </p:nvSpPr>
-        <p:spPr>
-          <a:xfrm>
-            <a:off x="8357616" y="4846320"/>
-            <a:ext cx="3108960" cy="365760"/>
-          </a:xfrm>
-          <a:prstGeom prst="rect">
-            <a:avLst/>
-          </a:prstGeom>
-          <a:noFill/>
-        </p:spPr>
-        <p:txBody>
-          <a:bodyPr wrap="square" lIns="0" rIns="0" tIns="0" bIns="0" anchor="t">
-            <a:spAutoFit/>
-          </a:bodyPr>
-          <a:lstStyle/>
-          <a:p>
-            <a:pPr algn="l"/>
-            <a:r>
-              <a:rPr sz="1600" b="1" i="0">
-                <a:solidFill>
-                  <a:srgbClr val="142340"/>
-                </a:solidFill>
-                <a:latin typeface="Calibri"/>
-              </a:rPr>
-              <a:t>command to reproduce</a:t>
-            </a:r>
-          </a:p>
-        </p:txBody>
-      </p:sp>
-      <p:sp>
-        <p:nvSpPr>
-          <p:cNvPr id="27" name="TextBox 26"/>
-          <p:cNvSpPr txBox="1"/>
-          <p:nvPr/>
-        </p:nvSpPr>
-        <p:spPr>
-          <a:xfrm>
-            <a:off x="8357616" y="5257800"/>
-            <a:ext cx="3108960" cy="731520"/>
-          </a:xfrm>
-          <a:prstGeom prst="rect">
-            <a:avLst/>
-          </a:prstGeom>
-          <a:noFill/>
-        </p:spPr>
-        <p:txBody>
-          <a:bodyPr wrap="square" lIns="0" rIns="0" tIns="0" bIns="0" anchor="t">
-            <a:spAutoFit/>
-          </a:bodyPr>
-          <a:lstStyle/>
-          <a:p>
-            <a:pPr algn="l"/>
-            <a:r>
-              <a:rPr sz="1300" b="0" i="0">
-                <a:solidFill>
-                  <a:srgbClr val="52514E"/>
-                </a:solidFill>
-                <a:latin typeface="Calibri"/>
-              </a:rPr>
-              <a:t>python -m src.run_all → figures, results.json, report, slides</a:t>
-            </a:r>
-          </a:p>
-        </p:txBody>
-      </p:sp>
-      <p:sp>
-        <p:nvSpPr>
-          <p:cNvPr id="28" name="TextBox 27"/>
           <p:cNvSpPr txBox="1"/>
           <p:nvPr/>
         </p:nvSpPr>
@@ -8403,14 +7930,14 @@
                 </a:solidFill>
                 <a:latin typeface="Calibri"/>
               </a:rPr>
-              <a:t>Group [XX]  ·  Earthquake damage prediction with logistic regression</a:t>
-            </a:r>
-          </a:p>
-        </p:txBody>
-      </p:sp>
-      <p:sp>
-        <p:nvSpPr>
-          <p:cNvPr id="29" name="TextBox 28"/>
+              <a:t>Group [XX]  ·  Earthquake damage prediction: logistic regression, random forest, gradient boosting</a:t>
+            </a:r>
+          </a:p>
+        </p:txBody>
+      </p:sp>
+      <p:sp>
+        <p:nvSpPr>
+          <p:cNvPr id="11" name="TextBox 10"/>
           <p:cNvSpPr txBox="1"/>
           <p:nvPr/>
         </p:nvSpPr>
@@ -8499,6 +8026,1078 @@
                 </a:solidFill>
                 <a:latin typeface="Calibri"/>
               </a:rPr>
+              <a:t>SUMMARY OF PROJECT ACHIEVEMENTS</a:t>
+            </a:r>
+          </a:p>
+        </p:txBody>
+      </p:sp>
+      <p:sp>
+        <p:nvSpPr>
+          <p:cNvPr id="3" name="Title"/>
+          <p:cNvSpPr txBox="1"/>
+          <p:nvPr/>
+        </p:nvSpPr>
+        <p:spPr>
+          <a:xfrm>
+            <a:off x="548640" y="621792"/>
+            <a:ext cx="11064240" cy="731520"/>
+          </a:xfrm>
+          <a:prstGeom prst="rect">
+            <a:avLst/>
+          </a:prstGeom>
+          <a:noFill/>
+        </p:spPr>
+        <p:txBody>
+          <a:bodyPr wrap="square" lIns="0" rIns="0" tIns="0" bIns="0" anchor="t">
+            <a:spAutoFit/>
+          </a:bodyPr>
+          <a:lstStyle/>
+          <a:p>
+            <a:pPr algn="l"/>
+            <a:r>
+              <a:rPr sz="3000" b="1" i="0">
+                <a:solidFill>
+                  <a:srgbClr val="142340"/>
+                </a:solidFill>
+                <a:latin typeface="Cambria"/>
+              </a:rPr>
+              <a:t>What we delivered</a:t>
+            </a:r>
+          </a:p>
+        </p:txBody>
+      </p:sp>
+      <p:sp>
+        <p:nvSpPr>
+          <p:cNvPr id="4" name="Rounded Rectangle 3"/>
+          <p:cNvSpPr/>
+          <p:nvPr/>
+        </p:nvSpPr>
+        <p:spPr>
+          <a:xfrm>
+            <a:off x="548640" y="1600200"/>
+            <a:ext cx="3566160" cy="2103120"/>
+          </a:xfrm>
+          <a:prstGeom prst="roundRect">
+            <a:avLst>
+              <a:gd name="adj" fmla="val 8000"/>
+            </a:avLst>
+          </a:prstGeom>
+          <a:solidFill>
+            <a:srgbClr val="F1F5FB"/>
+          </a:solidFill>
+          <a:ln>
+            <a:noFill/>
+          </a:ln>
+          <a:effectLst/>
+        </p:spPr>
+        <p:style>
+          <a:lnRef idx="1">
+            <a:schemeClr val="accent1"/>
+          </a:lnRef>
+          <a:fillRef idx="3">
+            <a:schemeClr val="accent1"/>
+          </a:fillRef>
+          <a:effectRef idx="2">
+            <a:schemeClr val="accent1"/>
+          </a:effectRef>
+          <a:fontRef idx="minor">
+            <a:schemeClr val="lt1"/>
+          </a:fontRef>
+        </p:style>
+        <p:txBody>
+          <a:bodyPr rtlCol="0" anchor="ctr"/>
+          <a:lstStyle/>
+          <a:p>
+            <a:pPr algn="ctr"/>
+          </a:p>
+        </p:txBody>
+      </p:sp>
+      <p:sp>
+        <p:nvSpPr>
+          <p:cNvPr id="5" name="TextBox 4"/>
+          <p:cNvSpPr txBox="1"/>
+          <p:nvPr/>
+        </p:nvSpPr>
+        <p:spPr>
+          <a:xfrm>
+            <a:off x="822959" y="1783080"/>
+            <a:ext cx="3108960" cy="731520"/>
+          </a:xfrm>
+          <a:prstGeom prst="rect">
+            <a:avLst/>
+          </a:prstGeom>
+          <a:noFill/>
+        </p:spPr>
+        <p:txBody>
+          <a:bodyPr wrap="square" lIns="0" rIns="0" tIns="0" bIns="0" anchor="t">
+            <a:spAutoFit/>
+          </a:bodyPr>
+          <a:lstStyle/>
+          <a:p>
+            <a:pPr algn="l"/>
+            <a:r>
+              <a:rPr sz="3600" b="1" i="0">
+                <a:solidFill>
+                  <a:srgbClr val="EB6834"/>
+                </a:solidFill>
+                <a:latin typeface="Cambria"/>
+              </a:rPr>
+              <a:t>0.750</a:t>
+            </a:r>
+          </a:p>
+        </p:txBody>
+      </p:sp>
+      <p:sp>
+        <p:nvSpPr>
+          <p:cNvPr id="6" name="TextBox 5"/>
+          <p:cNvSpPr txBox="1"/>
+          <p:nvPr/>
+        </p:nvSpPr>
+        <p:spPr>
+          <a:xfrm>
+            <a:off x="822959" y="2514600"/>
+            <a:ext cx="3108960" cy="365760"/>
+          </a:xfrm>
+          <a:prstGeom prst="rect">
+            <a:avLst/>
+          </a:prstGeom>
+          <a:noFill/>
+        </p:spPr>
+        <p:txBody>
+          <a:bodyPr wrap="square" lIns="0" rIns="0" tIns="0" bIns="0" anchor="t">
+            <a:spAutoFit/>
+          </a:bodyPr>
+          <a:lstStyle/>
+          <a:p>
+            <a:pPr algn="l"/>
+            <a:r>
+              <a:rPr sz="1600" b="1" i="0">
+                <a:solidFill>
+                  <a:srgbClr val="142340"/>
+                </a:solidFill>
+                <a:latin typeface="Calibri"/>
+              </a:rPr>
+              <a:t>holdout micro-F1</a:t>
+            </a:r>
+          </a:p>
+        </p:txBody>
+      </p:sp>
+      <p:sp>
+        <p:nvSpPr>
+          <p:cNvPr id="7" name="TextBox 6"/>
+          <p:cNvSpPr txBox="1"/>
+          <p:nvPr/>
+        </p:nvSpPr>
+        <p:spPr>
+          <a:xfrm>
+            <a:off x="822959" y="2926080"/>
+            <a:ext cx="3108960" cy="731520"/>
+          </a:xfrm>
+          <a:prstGeom prst="rect">
+            <a:avLst/>
+          </a:prstGeom>
+          <a:noFill/>
+        </p:spPr>
+        <p:txBody>
+          <a:bodyPr wrap="square" lIns="0" rIns="0" tIns="0" bIns="0" anchor="t">
+            <a:spAutoFit/>
+          </a:bodyPr>
+          <a:lstStyle/>
+          <a:p>
+            <a:pPr algn="l"/>
+            <a:r>
+              <a:rPr sz="1300" b="0" i="0">
+                <a:solidFill>
+                  <a:srgbClr val="52514E"/>
+                </a:solidFill>
+                <a:latin typeface="Calibri"/>
+              </a:rPr>
+              <a:t>HistGradientBoosting vs 0.569 for the majority baseline</a:t>
+            </a:r>
+          </a:p>
+        </p:txBody>
+      </p:sp>
+      <p:sp>
+        <p:nvSpPr>
+          <p:cNvPr id="8" name="Rounded Rectangle 7"/>
+          <p:cNvSpPr/>
+          <p:nvPr/>
+        </p:nvSpPr>
+        <p:spPr>
+          <a:xfrm>
+            <a:off x="4315968" y="1600200"/>
+            <a:ext cx="3566160" cy="2103120"/>
+          </a:xfrm>
+          <a:prstGeom prst="roundRect">
+            <a:avLst>
+              <a:gd name="adj" fmla="val 8000"/>
+            </a:avLst>
+          </a:prstGeom>
+          <a:solidFill>
+            <a:srgbClr val="F1F5FB"/>
+          </a:solidFill>
+          <a:ln>
+            <a:noFill/>
+          </a:ln>
+          <a:effectLst/>
+        </p:spPr>
+        <p:style>
+          <a:lnRef idx="1">
+            <a:schemeClr val="accent1"/>
+          </a:lnRef>
+          <a:fillRef idx="3">
+            <a:schemeClr val="accent1"/>
+          </a:fillRef>
+          <a:effectRef idx="2">
+            <a:schemeClr val="accent1"/>
+          </a:effectRef>
+          <a:fontRef idx="minor">
+            <a:schemeClr val="lt1"/>
+          </a:fontRef>
+        </p:style>
+        <p:txBody>
+          <a:bodyPr rtlCol="0" anchor="ctr"/>
+          <a:lstStyle/>
+          <a:p>
+            <a:pPr algn="ctr"/>
+          </a:p>
+        </p:txBody>
+      </p:sp>
+      <p:sp>
+        <p:nvSpPr>
+          <p:cNvPr id="9" name="TextBox 8"/>
+          <p:cNvSpPr txBox="1"/>
+          <p:nvPr/>
+        </p:nvSpPr>
+        <p:spPr>
+          <a:xfrm>
+            <a:off x="4590288" y="1783080"/>
+            <a:ext cx="3108960" cy="731520"/>
+          </a:xfrm>
+          <a:prstGeom prst="rect">
+            <a:avLst/>
+          </a:prstGeom>
+          <a:noFill/>
+        </p:spPr>
+        <p:txBody>
+          <a:bodyPr wrap="square" lIns="0" rIns="0" tIns="0" bIns="0" anchor="t">
+            <a:spAutoFit/>
+          </a:bodyPr>
+          <a:lstStyle/>
+          <a:p>
+            <a:pPr algn="l"/>
+            <a:r>
+              <a:rPr sz="3600" b="1" i="0">
+                <a:solidFill>
+                  <a:srgbClr val="EB6834"/>
+                </a:solidFill>
+                <a:latin typeface="Cambria"/>
+              </a:rPr>
+              <a:t>51%</a:t>
+            </a:r>
+          </a:p>
+        </p:txBody>
+      </p:sp>
+      <p:sp>
+        <p:nvSpPr>
+          <p:cNvPr id="10" name="TextBox 9"/>
+          <p:cNvSpPr txBox="1"/>
+          <p:nvPr/>
+        </p:nvSpPr>
+        <p:spPr>
+          <a:xfrm>
+            <a:off x="4590288" y="2514600"/>
+            <a:ext cx="3108960" cy="365760"/>
+          </a:xfrm>
+          <a:prstGeom prst="rect">
+            <a:avLst/>
+          </a:prstGeom>
+          <a:noFill/>
+        </p:spPr>
+        <p:txBody>
+          <a:bodyPr wrap="square" lIns="0" rIns="0" tIns="0" bIns="0" anchor="t">
+            <a:spAutoFit/>
+          </a:bodyPr>
+          <a:lstStyle/>
+          <a:p>
+            <a:pPr algn="l"/>
+            <a:r>
+              <a:rPr sz="1600" b="1" i="0">
+                <a:solidFill>
+                  <a:srgbClr val="142340"/>
+                </a:solidFill>
+                <a:latin typeface="Calibri"/>
+              </a:rPr>
+              <a:t>of destroyed buildings</a:t>
+            </a:r>
+          </a:p>
+        </p:txBody>
+      </p:sp>
+      <p:sp>
+        <p:nvSpPr>
+          <p:cNvPr id="11" name="TextBox 10"/>
+          <p:cNvSpPr txBox="1"/>
+          <p:nvPr/>
+        </p:nvSpPr>
+        <p:spPr>
+          <a:xfrm>
+            <a:off x="4590288" y="2926080"/>
+            <a:ext cx="3108960" cy="731520"/>
+          </a:xfrm>
+          <a:prstGeom prst="rect">
+            <a:avLst/>
+          </a:prstGeom>
+          <a:noFill/>
+        </p:spPr>
+        <p:txBody>
+          <a:bodyPr wrap="square" lIns="0" rIns="0" tIns="0" bIns="0" anchor="t">
+            <a:spAutoFit/>
+          </a:bodyPr>
+          <a:lstStyle/>
+          <a:p>
+            <a:pPr algn="l"/>
+            <a:r>
+              <a:rPr sz="1300" b="0" i="0">
+                <a:solidFill>
+                  <a:srgbClr val="52514E"/>
+                </a:solidFill>
+                <a:latin typeface="Calibri"/>
+              </a:rPr>
+              <a:t>found by inspecting just the top 20% of the ranked list</a:t>
+            </a:r>
+          </a:p>
+        </p:txBody>
+      </p:sp>
+      <p:sp>
+        <p:nvSpPr>
+          <p:cNvPr id="12" name="Rounded Rectangle 11"/>
+          <p:cNvSpPr/>
+          <p:nvPr/>
+        </p:nvSpPr>
+        <p:spPr>
+          <a:xfrm>
+            <a:off x="8083296" y="1600200"/>
+            <a:ext cx="3566160" cy="2103120"/>
+          </a:xfrm>
+          <a:prstGeom prst="roundRect">
+            <a:avLst>
+              <a:gd name="adj" fmla="val 8000"/>
+            </a:avLst>
+          </a:prstGeom>
+          <a:solidFill>
+            <a:srgbClr val="F1F5FB"/>
+          </a:solidFill>
+          <a:ln>
+            <a:noFill/>
+          </a:ln>
+          <a:effectLst/>
+        </p:spPr>
+        <p:style>
+          <a:lnRef idx="1">
+            <a:schemeClr val="accent1"/>
+          </a:lnRef>
+          <a:fillRef idx="3">
+            <a:schemeClr val="accent1"/>
+          </a:fillRef>
+          <a:effectRef idx="2">
+            <a:schemeClr val="accent1"/>
+          </a:effectRef>
+          <a:fontRef idx="minor">
+            <a:schemeClr val="lt1"/>
+          </a:fontRef>
+        </p:style>
+        <p:txBody>
+          <a:bodyPr rtlCol="0" anchor="ctr"/>
+          <a:lstStyle/>
+          <a:p>
+            <a:pPr algn="ctr"/>
+          </a:p>
+        </p:txBody>
+      </p:sp>
+      <p:sp>
+        <p:nvSpPr>
+          <p:cNvPr id="13" name="TextBox 12"/>
+          <p:cNvSpPr txBox="1"/>
+          <p:nvPr/>
+        </p:nvSpPr>
+        <p:spPr>
+          <a:xfrm>
+            <a:off x="8357616" y="1783080"/>
+            <a:ext cx="3108960" cy="731520"/>
+          </a:xfrm>
+          <a:prstGeom prst="rect">
+            <a:avLst/>
+          </a:prstGeom>
+          <a:noFill/>
+        </p:spPr>
+        <p:txBody>
+          <a:bodyPr wrap="square" lIns="0" rIns="0" tIns="0" bIns="0" anchor="t">
+            <a:spAutoFit/>
+          </a:bodyPr>
+          <a:lstStyle/>
+          <a:p>
+            <a:pPr algn="l"/>
+            <a:r>
+              <a:rPr sz="3600" b="1" i="0">
+                <a:solidFill>
+                  <a:srgbClr val="142340"/>
+                </a:solidFill>
+                <a:latin typeface="Cambria"/>
+              </a:rPr>
+              <a:t>+6.3 pp</a:t>
+            </a:r>
+          </a:p>
+        </p:txBody>
+      </p:sp>
+      <p:sp>
+        <p:nvSpPr>
+          <p:cNvPr id="14" name="TextBox 13"/>
+          <p:cNvSpPr txBox="1"/>
+          <p:nvPr/>
+        </p:nvSpPr>
+        <p:spPr>
+          <a:xfrm>
+            <a:off x="8357616" y="2514600"/>
+            <a:ext cx="3108960" cy="365760"/>
+          </a:xfrm>
+          <a:prstGeom prst="rect">
+            <a:avLst/>
+          </a:prstGeom>
+          <a:noFill/>
+        </p:spPr>
+        <p:txBody>
+          <a:bodyPr wrap="square" lIns="0" rIns="0" tIns="0" bIns="0" anchor="t">
+            <a:spAutoFit/>
+          </a:bodyPr>
+          <a:lstStyle/>
+          <a:p>
+            <a:pPr algn="l"/>
+            <a:r>
+              <a:rPr sz="1600" b="1" i="0">
+                <a:solidFill>
+                  <a:srgbClr val="142340"/>
+                </a:solidFill>
+                <a:latin typeface="Calibri"/>
+              </a:rPr>
+              <a:t>from geo target encoding</a:t>
+            </a:r>
+          </a:p>
+        </p:txBody>
+      </p:sp>
+      <p:sp>
+        <p:nvSpPr>
+          <p:cNvPr id="15" name="TextBox 14"/>
+          <p:cNvSpPr txBox="1"/>
+          <p:nvPr/>
+        </p:nvSpPr>
+        <p:spPr>
+          <a:xfrm>
+            <a:off x="8357616" y="2926080"/>
+            <a:ext cx="3108960" cy="731520"/>
+          </a:xfrm>
+          <a:prstGeom prst="rect">
+            <a:avLst/>
+          </a:prstGeom>
+          <a:noFill/>
+        </p:spPr>
+        <p:txBody>
+          <a:bodyPr wrap="square" lIns="0" rIns="0" tIns="0" bIns="0" anchor="t">
+            <a:spAutoFit/>
+          </a:bodyPr>
+          <a:lstStyle/>
+          <a:p>
+            <a:pPr algn="l"/>
+            <a:r>
+              <a:rPr sz="1300" b="0" i="0">
+                <a:solidFill>
+                  <a:srgbClr val="52514E"/>
+                </a:solidFill>
+                <a:latin typeface="Calibri"/>
+              </a:rPr>
+              <a:t>leakage-safe encoding of 11,595 villages</a:t>
+            </a:r>
+          </a:p>
+        </p:txBody>
+      </p:sp>
+      <p:sp>
+        <p:nvSpPr>
+          <p:cNvPr id="16" name="Rounded Rectangle 15"/>
+          <p:cNvSpPr/>
+          <p:nvPr/>
+        </p:nvSpPr>
+        <p:spPr>
+          <a:xfrm>
+            <a:off x="548640" y="3931920"/>
+            <a:ext cx="3566160" cy="2103120"/>
+          </a:xfrm>
+          <a:prstGeom prst="roundRect">
+            <a:avLst>
+              <a:gd name="adj" fmla="val 8000"/>
+            </a:avLst>
+          </a:prstGeom>
+          <a:solidFill>
+            <a:srgbClr val="F1F5FB"/>
+          </a:solidFill>
+          <a:ln>
+            <a:noFill/>
+          </a:ln>
+          <a:effectLst/>
+        </p:spPr>
+        <p:style>
+          <a:lnRef idx="1">
+            <a:schemeClr val="accent1"/>
+          </a:lnRef>
+          <a:fillRef idx="3">
+            <a:schemeClr val="accent1"/>
+          </a:fillRef>
+          <a:effectRef idx="2">
+            <a:schemeClr val="accent1"/>
+          </a:effectRef>
+          <a:fontRef idx="minor">
+            <a:schemeClr val="lt1"/>
+          </a:fontRef>
+        </p:style>
+        <p:txBody>
+          <a:bodyPr rtlCol="0" anchor="ctr"/>
+          <a:lstStyle/>
+          <a:p>
+            <a:pPr algn="ctr"/>
+          </a:p>
+        </p:txBody>
+      </p:sp>
+      <p:sp>
+        <p:nvSpPr>
+          <p:cNvPr id="17" name="TextBox 16"/>
+          <p:cNvSpPr txBox="1"/>
+          <p:nvPr/>
+        </p:nvSpPr>
+        <p:spPr>
+          <a:xfrm>
+            <a:off x="822959" y="4114800"/>
+            <a:ext cx="3108960" cy="731520"/>
+          </a:xfrm>
+          <a:prstGeom prst="rect">
+            <a:avLst/>
+          </a:prstGeom>
+          <a:noFill/>
+        </p:spPr>
+        <p:txBody>
+          <a:bodyPr wrap="square" lIns="0" rIns="0" tIns="0" bIns="0" anchor="t">
+            <a:spAutoFit/>
+          </a:bodyPr>
+          <a:lstStyle/>
+          <a:p>
+            <a:pPr algn="l"/>
+            <a:r>
+              <a:rPr sz="3600" b="1" i="0">
+                <a:solidFill>
+                  <a:srgbClr val="142340"/>
+                </a:solidFill>
+                <a:latin typeface="Cambria"/>
+              </a:rPr>
+              <a:t>3</a:t>
+            </a:r>
+          </a:p>
+        </p:txBody>
+      </p:sp>
+      <p:sp>
+        <p:nvSpPr>
+          <p:cNvPr id="18" name="TextBox 17"/>
+          <p:cNvSpPr txBox="1"/>
+          <p:nvPr/>
+        </p:nvSpPr>
+        <p:spPr>
+          <a:xfrm>
+            <a:off x="822959" y="4846320"/>
+            <a:ext cx="3108960" cy="365760"/>
+          </a:xfrm>
+          <a:prstGeom prst="rect">
+            <a:avLst/>
+          </a:prstGeom>
+          <a:noFill/>
+        </p:spPr>
+        <p:txBody>
+          <a:bodyPr wrap="square" lIns="0" rIns="0" tIns="0" bIns="0" anchor="t">
+            <a:spAutoFit/>
+          </a:bodyPr>
+          <a:lstStyle/>
+          <a:p>
+            <a:pPr algn="l"/>
+            <a:r>
+              <a:rPr sz="1600" b="1" i="0">
+                <a:solidFill>
+                  <a:srgbClr val="142340"/>
+                </a:solidFill>
+                <a:latin typeface="Calibri"/>
+              </a:rPr>
+              <a:t>models compared fairly</a:t>
+            </a:r>
+          </a:p>
+        </p:txBody>
+      </p:sp>
+      <p:sp>
+        <p:nvSpPr>
+          <p:cNvPr id="19" name="TextBox 18"/>
+          <p:cNvSpPr txBox="1"/>
+          <p:nvPr/>
+        </p:nvSpPr>
+        <p:spPr>
+          <a:xfrm>
+            <a:off x="822959" y="5257800"/>
+            <a:ext cx="3108960" cy="731520"/>
+          </a:xfrm>
+          <a:prstGeom prst="rect">
+            <a:avLst/>
+          </a:prstGeom>
+          <a:noFill/>
+        </p:spPr>
+        <p:txBody>
+          <a:bodyPr wrap="square" lIns="0" rIns="0" tIns="0" bIns="0" anchor="t">
+            <a:spAutoFit/>
+          </a:bodyPr>
+          <a:lstStyle/>
+          <a:p>
+            <a:pPr algn="l"/>
+            <a:r>
+              <a:rPr sz="1300" b="0" i="0">
+                <a:solidFill>
+                  <a:srgbClr val="52514E"/>
+                </a:solidFill>
+                <a:latin typeface="Calibri"/>
+              </a:rPr>
+              <a:t>same features and folds; trees +0.98 pp over LR in CV</a:t>
+            </a:r>
+          </a:p>
+        </p:txBody>
+      </p:sp>
+      <p:sp>
+        <p:nvSpPr>
+          <p:cNvPr id="20" name="Rounded Rectangle 19"/>
+          <p:cNvSpPr/>
+          <p:nvPr/>
+        </p:nvSpPr>
+        <p:spPr>
+          <a:xfrm>
+            <a:off x="4315968" y="3931920"/>
+            <a:ext cx="3566160" cy="2103120"/>
+          </a:xfrm>
+          <a:prstGeom prst="roundRect">
+            <a:avLst>
+              <a:gd name="adj" fmla="val 8000"/>
+            </a:avLst>
+          </a:prstGeom>
+          <a:solidFill>
+            <a:srgbClr val="F1F5FB"/>
+          </a:solidFill>
+          <a:ln>
+            <a:noFill/>
+          </a:ln>
+          <a:effectLst/>
+        </p:spPr>
+        <p:style>
+          <a:lnRef idx="1">
+            <a:schemeClr val="accent1"/>
+          </a:lnRef>
+          <a:fillRef idx="3">
+            <a:schemeClr val="accent1"/>
+          </a:fillRef>
+          <a:effectRef idx="2">
+            <a:schemeClr val="accent1"/>
+          </a:effectRef>
+          <a:fontRef idx="minor">
+            <a:schemeClr val="lt1"/>
+          </a:fontRef>
+        </p:style>
+        <p:txBody>
+          <a:bodyPr rtlCol="0" anchor="ctr"/>
+          <a:lstStyle/>
+          <a:p>
+            <a:pPr algn="ctr"/>
+          </a:p>
+        </p:txBody>
+      </p:sp>
+      <p:sp>
+        <p:nvSpPr>
+          <p:cNvPr id="21" name="TextBox 20"/>
+          <p:cNvSpPr txBox="1"/>
+          <p:nvPr/>
+        </p:nvSpPr>
+        <p:spPr>
+          <a:xfrm>
+            <a:off x="4590288" y="4114800"/>
+            <a:ext cx="3108960" cy="731520"/>
+          </a:xfrm>
+          <a:prstGeom prst="rect">
+            <a:avLst/>
+          </a:prstGeom>
+          <a:noFill/>
+        </p:spPr>
+        <p:txBody>
+          <a:bodyPr wrap="square" lIns="0" rIns="0" tIns="0" bIns="0" anchor="t">
+            <a:spAutoFit/>
+          </a:bodyPr>
+          <a:lstStyle/>
+          <a:p>
+            <a:pPr algn="l"/>
+            <a:r>
+              <a:rPr sz="3600" b="1" i="0">
+                <a:solidFill>
+                  <a:srgbClr val="142340"/>
+                </a:solidFill>
+                <a:latin typeface="Cambria"/>
+              </a:rPr>
+              <a:t>7</a:t>
+            </a:r>
+          </a:p>
+        </p:txBody>
+      </p:sp>
+      <p:sp>
+        <p:nvSpPr>
+          <p:cNvPr id="22" name="TextBox 21"/>
+          <p:cNvSpPr txBox="1"/>
+          <p:nvPr/>
+        </p:nvSpPr>
+        <p:spPr>
+          <a:xfrm>
+            <a:off x="4590288" y="4846320"/>
+            <a:ext cx="3108960" cy="365760"/>
+          </a:xfrm>
+          <a:prstGeom prst="rect">
+            <a:avLst/>
+          </a:prstGeom>
+          <a:noFill/>
+        </p:spPr>
+        <p:txBody>
+          <a:bodyPr wrap="square" lIns="0" rIns="0" tIns="0" bIns="0" anchor="t">
+            <a:spAutoFit/>
+          </a:bodyPr>
+          <a:lstStyle/>
+          <a:p>
+            <a:pPr algn="l"/>
+            <a:r>
+              <a:rPr sz="1600" b="1" i="0">
+                <a:solidFill>
+                  <a:srgbClr val="142340"/>
+                </a:solidFill>
+                <a:latin typeface="Calibri"/>
+              </a:rPr>
+              <a:t>controlled LR experiments</a:t>
+            </a:r>
+          </a:p>
+        </p:txBody>
+      </p:sp>
+      <p:sp>
+        <p:nvSpPr>
+          <p:cNvPr id="23" name="TextBox 22"/>
+          <p:cNvSpPr txBox="1"/>
+          <p:nvPr/>
+        </p:nvSpPr>
+        <p:spPr>
+          <a:xfrm>
+            <a:off x="4590288" y="5257800"/>
+            <a:ext cx="3108960" cy="731520"/>
+          </a:xfrm>
+          <a:prstGeom prst="rect">
+            <a:avLst/>
+          </a:prstGeom>
+          <a:noFill/>
+        </p:spPr>
+        <p:txBody>
+          <a:bodyPr wrap="square" lIns="0" rIns="0" tIns="0" bIns="0" anchor="t">
+            <a:spAutoFit/>
+          </a:bodyPr>
+          <a:lstStyle/>
+          <a:p>
+            <a:pPr algn="l"/>
+            <a:r>
+              <a:rPr sz="1300" b="0" i="0">
+                <a:solidFill>
+                  <a:srgbClr val="52514E"/>
+                </a:solidFill>
+                <a:latin typeface="Calibri"/>
+              </a:rPr>
+              <a:t>incl. an honest negative result for the ordinal model</a:t>
+            </a:r>
+          </a:p>
+        </p:txBody>
+      </p:sp>
+      <p:sp>
+        <p:nvSpPr>
+          <p:cNvPr id="24" name="Rounded Rectangle 23"/>
+          <p:cNvSpPr/>
+          <p:nvPr/>
+        </p:nvSpPr>
+        <p:spPr>
+          <a:xfrm>
+            <a:off x="8083296" y="3931920"/>
+            <a:ext cx="3566160" cy="2103120"/>
+          </a:xfrm>
+          <a:prstGeom prst="roundRect">
+            <a:avLst>
+              <a:gd name="adj" fmla="val 8000"/>
+            </a:avLst>
+          </a:prstGeom>
+          <a:solidFill>
+            <a:srgbClr val="F1F5FB"/>
+          </a:solidFill>
+          <a:ln>
+            <a:noFill/>
+          </a:ln>
+          <a:effectLst/>
+        </p:spPr>
+        <p:style>
+          <a:lnRef idx="1">
+            <a:schemeClr val="accent1"/>
+          </a:lnRef>
+          <a:fillRef idx="3">
+            <a:schemeClr val="accent1"/>
+          </a:fillRef>
+          <a:effectRef idx="2">
+            <a:schemeClr val="accent1"/>
+          </a:effectRef>
+          <a:fontRef idx="minor">
+            <a:schemeClr val="lt1"/>
+          </a:fontRef>
+        </p:style>
+        <p:txBody>
+          <a:bodyPr rtlCol="0" anchor="ctr"/>
+          <a:lstStyle/>
+          <a:p>
+            <a:pPr algn="ctr"/>
+          </a:p>
+        </p:txBody>
+      </p:sp>
+      <p:sp>
+        <p:nvSpPr>
+          <p:cNvPr id="25" name="TextBox 24"/>
+          <p:cNvSpPr txBox="1"/>
+          <p:nvPr/>
+        </p:nvSpPr>
+        <p:spPr>
+          <a:xfrm>
+            <a:off x="8357616" y="4114800"/>
+            <a:ext cx="3108960" cy="731520"/>
+          </a:xfrm>
+          <a:prstGeom prst="rect">
+            <a:avLst/>
+          </a:prstGeom>
+          <a:noFill/>
+        </p:spPr>
+        <p:txBody>
+          <a:bodyPr wrap="square" lIns="0" rIns="0" tIns="0" bIns="0" anchor="t">
+            <a:spAutoFit/>
+          </a:bodyPr>
+          <a:lstStyle/>
+          <a:p>
+            <a:pPr algn="l"/>
+            <a:r>
+              <a:rPr sz="3600" b="1" i="0">
+                <a:solidFill>
+                  <a:srgbClr val="142340"/>
+                </a:solidFill>
+                <a:latin typeface="Cambria"/>
+              </a:rPr>
+              <a:t>1</a:t>
+            </a:r>
+          </a:p>
+        </p:txBody>
+      </p:sp>
+      <p:sp>
+        <p:nvSpPr>
+          <p:cNvPr id="26" name="TextBox 25"/>
+          <p:cNvSpPr txBox="1"/>
+          <p:nvPr/>
+        </p:nvSpPr>
+        <p:spPr>
+          <a:xfrm>
+            <a:off x="8357616" y="4846320"/>
+            <a:ext cx="3108960" cy="365760"/>
+          </a:xfrm>
+          <a:prstGeom prst="rect">
+            <a:avLst/>
+          </a:prstGeom>
+          <a:noFill/>
+        </p:spPr>
+        <p:txBody>
+          <a:bodyPr wrap="square" lIns="0" rIns="0" tIns="0" bIns="0" anchor="t">
+            <a:spAutoFit/>
+          </a:bodyPr>
+          <a:lstStyle/>
+          <a:p>
+            <a:pPr algn="l"/>
+            <a:r>
+              <a:rPr sz="1600" b="1" i="0">
+                <a:solidFill>
+                  <a:srgbClr val="142340"/>
+                </a:solidFill>
+                <a:latin typeface="Calibri"/>
+              </a:rPr>
+              <a:t>command to reproduce</a:t>
+            </a:r>
+          </a:p>
+        </p:txBody>
+      </p:sp>
+      <p:sp>
+        <p:nvSpPr>
+          <p:cNvPr id="27" name="TextBox 26"/>
+          <p:cNvSpPr txBox="1"/>
+          <p:nvPr/>
+        </p:nvSpPr>
+        <p:spPr>
+          <a:xfrm>
+            <a:off x="8357616" y="5257800"/>
+            <a:ext cx="3108960" cy="731520"/>
+          </a:xfrm>
+          <a:prstGeom prst="rect">
+            <a:avLst/>
+          </a:prstGeom>
+          <a:noFill/>
+        </p:spPr>
+        <p:txBody>
+          <a:bodyPr wrap="square" lIns="0" rIns="0" tIns="0" bIns="0" anchor="t">
+            <a:spAutoFit/>
+          </a:bodyPr>
+          <a:lstStyle/>
+          <a:p>
+            <a:pPr algn="l"/>
+            <a:r>
+              <a:rPr sz="1300" b="0" i="0">
+                <a:solidFill>
+                  <a:srgbClr val="52514E"/>
+                </a:solidFill>
+                <a:latin typeface="Calibri"/>
+              </a:rPr>
+              <a:t>python -m src.run_all → figures, results.json, report, slides</a:t>
+            </a:r>
+          </a:p>
+        </p:txBody>
+      </p:sp>
+      <p:sp>
+        <p:nvSpPr>
+          <p:cNvPr id="28" name="TextBox 27"/>
+          <p:cNvSpPr txBox="1"/>
+          <p:nvPr/>
+        </p:nvSpPr>
+        <p:spPr>
+          <a:xfrm>
+            <a:off x="548640" y="6400800"/>
+            <a:ext cx="7315200" cy="228600"/>
+          </a:xfrm>
+          <a:prstGeom prst="rect">
+            <a:avLst/>
+          </a:prstGeom>
+          <a:noFill/>
+        </p:spPr>
+        <p:txBody>
+          <a:bodyPr wrap="square" lIns="0" rIns="0" tIns="0" bIns="0" anchor="t">
+            <a:spAutoFit/>
+          </a:bodyPr>
+          <a:lstStyle/>
+          <a:p>
+            <a:pPr algn="l"/>
+            <a:r>
+              <a:rPr sz="1000" b="0" i="0">
+                <a:solidFill>
+                  <a:srgbClr val="8A8984"/>
+                </a:solidFill>
+                <a:latin typeface="Calibri"/>
+              </a:rPr>
+              <a:t>Group [XX]  ·  Earthquake damage prediction: logistic regression, random forest, gradient boosting</a:t>
+            </a:r>
+          </a:p>
+        </p:txBody>
+      </p:sp>
+      <p:sp>
+        <p:nvSpPr>
+          <p:cNvPr id="29" name="TextBox 28"/>
+          <p:cNvSpPr txBox="1"/>
+          <p:nvPr/>
+        </p:nvSpPr>
+        <p:spPr>
+          <a:xfrm>
+            <a:off x="10881360" y="6400800"/>
+            <a:ext cx="777240" cy="228600"/>
+          </a:xfrm>
+          <a:prstGeom prst="rect">
+            <a:avLst/>
+          </a:prstGeom>
+          <a:noFill/>
+        </p:spPr>
+        <p:txBody>
+          <a:bodyPr wrap="square" lIns="0" rIns="0" tIns="0" bIns="0" anchor="t">
+            <a:spAutoFit/>
+          </a:bodyPr>
+          <a:lstStyle/>
+          <a:p>
+            <a:pPr algn="r"/>
+            <a:r>
+              <a:rPr sz="1000" b="0" i="0">
+                <a:solidFill>
+                  <a:srgbClr val="8A8984"/>
+                </a:solidFill>
+                <a:latin typeface="Calibri"/>
+              </a:rPr>
+              <a:t>15</a:t>
+            </a:r>
+          </a:p>
+        </p:txBody>
+      </p:sp>
+    </p:spTree>
+  </p:cSld>
+  <p:clrMapOvr>
+    <a:masterClrMapping/>
+  </p:clrMapOvr>
+</p:sld>
+</file>
+
+<file path=ppt/slides/slide16.xml><?xml version="1.0" encoding="utf-8"?>
+<p:sld xmlns:a="http://schemas.openxmlformats.org/drawingml/2006/main" xmlns:p="http://schemas.openxmlformats.org/presentationml/2006/main" xmlns:r="http://schemas.openxmlformats.org/officeDocument/2006/relationships">
+  <p:cSld>
+    <p:bg>
+      <p:bgPr>
+        <a:solidFill>
+          <a:srgbClr val="FFFFFF"/>
+        </a:solidFill>
+        <a:effectLst/>
+      </p:bgPr>
+    </p:bg>
+    <p:spTree>
+      <p:nvGrpSpPr>
+        <p:cNvPr id="1" name=""/>
+        <p:cNvGrpSpPr/>
+        <p:nvPr/>
+      </p:nvGrpSpPr>
+      <p:grpSpPr/>
+      <p:sp>
+        <p:nvSpPr>
+          <p:cNvPr id="2" name="Section label"/>
+          <p:cNvSpPr txBox="1"/>
+          <p:nvPr/>
+        </p:nvSpPr>
+        <p:spPr>
+          <a:xfrm>
+            <a:off x="548640" y="347472"/>
+            <a:ext cx="9144000" cy="274320"/>
+          </a:xfrm>
+          <a:prstGeom prst="rect">
+            <a:avLst/>
+          </a:prstGeom>
+          <a:noFill/>
+        </p:spPr>
+        <p:txBody>
+          <a:bodyPr wrap="square" lIns="0" rIns="0" tIns="0" bIns="0" anchor="t">
+            <a:spAutoFit/>
+          </a:bodyPr>
+          <a:lstStyle/>
+          <a:p>
+            <a:pPr algn="l"/>
+            <a:r>
+              <a:rPr sz="1200" b="1" i="0">
+                <a:solidFill>
+                  <a:srgbClr val="EB6834"/>
+                </a:solidFill>
+                <a:latin typeface="Calibri"/>
+              </a:rPr>
               <a:t>FUTURE DIRECTIONS FOR FURTHER IMPROVEMENTS</a:t>
             </a:r>
           </a:p>
@@ -8745,7 +9344,7 @@
                 </a:solidFill>
                 <a:latin typeface="Calibri"/>
               </a:rPr>
-              <a:t>Interactions, still linear</a:t>
+              <a:t>Interactions for LR</a:t>
             </a:r>
           </a:p>
         </p:txBody>
@@ -8780,7 +9379,7 @@
                 </a:solidFill>
                 <a:latin typeface="Calibri"/>
               </a:rPr>
-              <a:t>Material × region and floors × age interactions, or spline terms, keeping the model interpretable.</a:t>
+              <a:t>Material × region and floors × age terms or splines, to close the gap to the trees while staying interpretable.</a:t>
             </a:r>
           </a:p>
         </p:txBody>
@@ -8868,7 +9467,7 @@
                 </a:solidFill>
                 <a:latin typeface="Calibri"/>
               </a:rPr>
-              <a:t>True ordinal model</a:t>
+              <a:t>Explain the ensembles</a:t>
             </a:r>
           </a:p>
         </p:txBody>
@@ -8903,7 +9502,7 @@
                 </a:solidFill>
                 <a:latin typeface="Calibri"/>
               </a:rPr>
-              <a:t>A proportional-odds (cumulative-link) model with shared slopes, e.g. statsmodels OrderedModel or mord.</a:t>
+              <a:t>SHAP values for per-building explanations of the tree models, and wider tuning (LightGBM, CatBoost).</a:t>
             </a:r>
           </a:p>
         </p:txBody>
@@ -9237,7 +9836,7 @@
                 </a:solidFill>
                 <a:latin typeface="Calibri"/>
               </a:rPr>
-              <a:t>Benchmark &amp; deploy</a:t>
+              <a:t>Validate &amp; deploy</a:t>
             </a:r>
           </a:p>
         </p:txBody>
@@ -9272,7 +9871,7 @@
                 </a:solidFill>
                 <a:latin typeface="Calibri"/>
               </a:rPr>
-              <a:t>Compare with gradient boosting as an upper bound; package the pipeline as a simple triage tool.</a:t>
+              <a:t>Spatially grouped CV for unseen areas; package the final pipeline as a simple triage tool.</a:t>
             </a:r>
           </a:p>
         </p:txBody>
@@ -9342,7 +9941,7 @@
                 </a:solidFill>
                 <a:latin typeface="Calibri"/>
               </a:rPr>
-              <a:t>Group [XX]  ·  Earthquake damage prediction with logistic regression</a:t>
+              <a:t>Group [XX]  ·  Earthquake damage prediction: logistic regression, random forest, gradient boosting</a:t>
             </a:r>
           </a:p>
         </p:txBody>
@@ -9377,7 +9976,7 @@
                 </a:solidFill>
                 <a:latin typeface="Calibri"/>
               </a:rPr>
-              <a:t>15</a:t>
+              <a:t>16</a:t>
             </a:r>
           </a:p>
         </p:txBody>
@@ -10499,7 +11098,7 @@
                 </a:solidFill>
                 <a:latin typeface="Calibri"/>
               </a:rPr>
-              <a:t>Group [XX]  ·  Earthquake damage prediction with logistic regression</a:t>
+              <a:t>Group [XX]  ·  Earthquake damage prediction: logistic regression, random forest, gradient boosting</a:t>
             </a:r>
           </a:p>
         </p:txBody>
@@ -11168,7 +11767,7 @@
                 </a:solidFill>
                 <a:latin typeface="Calibri"/>
               </a:rPr>
-              <a:t>Constraint</a:t>
+              <a:t>Models</a:t>
             </a:r>
           </a:p>
         </p:txBody>
@@ -11203,7 +11802,7 @@
                 </a:solidFill>
                 <a:latin typeface="Calibri"/>
               </a:rPr>
-              <a:t>Logistic regression only: transparent, fast and easy to audit.</a:t>
+              <a:t>Logistic regression (transparent) vs random forest and HistGradientBoosting (flexible).</a:t>
             </a:r>
           </a:p>
         </p:txBody>
@@ -11238,7 +11837,7 @@
                 </a:solidFill>
                 <a:latin typeface="Calibri"/>
               </a:rPr>
-              <a:t>Group [XX]  ·  Earthquake damage prediction with logistic regression</a:t>
+              <a:t>Group [XX]  ·  Earthquake damage prediction: logistic regression, random forest, gradient boosting</a:t>
             </a:r>
           </a:p>
         </p:txBody>
@@ -11881,7 +12480,7 @@
                 </a:solidFill>
                 <a:latin typeface="Calibri"/>
               </a:rPr>
-              <a:t>Group [XX]  ·  Earthquake damage prediction with logistic regression</a:t>
+              <a:t>Group [XX]  ·  Earthquake damage prediction: logistic regression, random forest, gradient boosting</a:t>
             </a:r>
           </a:p>
         </p:txBody>
@@ -12188,7 +12787,7 @@
                 </a:solidFill>
                 <a:latin typeface="Calibri"/>
               </a:rPr>
-              <a:t>Group [XX]  ·  Earthquake damage prediction with logistic regression</a:t>
+              <a:t>Group [XX]  ·  Earthquake damage prediction: logistic regression, random forest, gradient boosting</a:t>
             </a:r>
           </a:p>
         </p:txBody>
@@ -12705,7 +13304,7 @@
                 </a:solidFill>
                 <a:latin typeface="Calibri"/>
               </a:rPr>
-              <a:t>Scale</a:t>
+              <a:t>Scale (LR)</a:t>
             </a:r>
           </a:p>
         </p:txBody>
@@ -12858,7 +13457,7 @@
                 </a:solidFill>
                 <a:latin typeface="Calibri"/>
               </a:rPr>
-              <a:t>One-hot</a:t>
+              <a:t>Encode</a:t>
             </a:r>
           </a:p>
         </p:txBody>
@@ -12893,8 +13492,8 @@
                 </a:solidFill>
                 <a:latin typeface="Calibri"/>
               </a:rPr>
-              <a:t>8 categoricals +
-region level 1</a:t>
+              <a:t>8 categoricals + region:
+LR one-hot, trees codes</a:t>
             </a:r>
           </a:p>
         </p:txBody>
@@ -13164,8 +13763,7 @@
                 </a:solidFill>
                 <a:latin typeface="Calibri"/>
               </a:rPr>
-              <a:t>Logistic
-regression</a:t>
+              <a:t>3 models</a:t>
             </a:r>
           </a:p>
         </p:txBody>
@@ -13200,7 +13798,8 @@
                 </a:solidFill>
                 <a:latin typeface="Calibri"/>
               </a:rPr>
-              <a:t>lbfgs, L2, tuned C</a:t>
+              <a:t>LR · random forest
+· gradient boosting</a:t>
             </a:r>
           </a:p>
         </p:txBody>
@@ -13980,7 +14579,7 @@
                 </a:solidFill>
                 <a:latin typeface="Calibri"/>
               </a:rPr>
-              <a:t>Group [XX]  ·  Earthquake damage prediction with logistic regression</a:t>
+              <a:t>Group [XX]  ·  Earthquake damage prediction: logistic regression, random forest, gradient boosting</a:t>
             </a:r>
           </a:p>
         </p:txBody>
@@ -14991,7 +15590,7 @@
                 </a:solidFill>
                 <a:latin typeface="Calibri"/>
               </a:rPr>
-              <a:t>Group [XX]  ·  Earthquake damage prediction with logistic regression</a:t>
+              <a:t>Group [XX]  ·  Earthquake damage prediction: logistic regression, random forest, gradient boosting</a:t>
             </a:r>
           </a:p>
         </p:txBody>
@@ -15541,7 +16140,7 @@
                 </a:solidFill>
                 <a:latin typeface="Calibri"/>
               </a:rPr>
-              <a:t>Group [XX]  ·  Earthquake damage prediction with logistic regression</a:t>
+              <a:t>Group [XX]  ·  Earthquake damage prediction: logistic regression, random forest, gradient boosting</a:t>
             </a:r>
           </a:p>
         </p:txBody>
@@ -15957,7 +16556,7 @@
                 </a:solidFill>
                 <a:latin typeface="Calibri"/>
               </a:rPr>
-              <a:t>Stratified 5-fold CV for every experiment (E0–E6)</a:t>
+              <a:t>Stratified 5-fold CV: LR experiments E0–E6</a:t>
             </a:r>
           </a:p>
           <a:p>
@@ -15973,7 +16572,7 @@
                 </a:solidFill>
                 <a:latin typeface="Calibri"/>
               </a:rPr>
-              <a:t>GridSearchCV over C ∈ {0.01 … 100}, scored by micro-F1</a:t>
+              <a:t>GridSearchCV, micro-F1: LR (9 values of C), random forest (4), boosting (6)</a:t>
             </a:r>
           </a:p>
           <a:p>
@@ -15989,7 +16588,7 @@
                 </a:solidFill>
                 <a:latin typeface="Calibri"/>
               </a:rPr>
-              <a:t>Encoders, scalers, imputers re-fit inside each fold</a:t>
+              <a:t>Encoders, imputers re-fit inside each fold</a:t>
             </a:r>
           </a:p>
         </p:txBody>
@@ -16105,7 +16704,7 @@
                 </a:solidFill>
                 <a:latin typeface="Calibri"/>
               </a:rPr>
-              <a:t>Locked away; scored exactly once, by the final tuned model.</a:t>
+              <a:t>Locked away; each of the 3 tuned models scored exactly once.</a:t>
             </a:r>
           </a:p>
         </p:txBody>
@@ -16242,7 +16841,7 @@
                 </a:solidFill>
                 <a:latin typeface="Calibri"/>
               </a:rPr>
-              <a:t>E4 configuration, C = 0.3</a:t>
+              <a:t>HistGradientBoosting: highest CV micro-F1 of the 3 tuned models</a:t>
             </a:r>
           </a:p>
           <a:p>
@@ -16258,7 +16857,7 @@
                 </a:solidFill>
                 <a:latin typeface="Calibri"/>
               </a:rPr>
-              <a:t>At most 337 of 5,000 solver iterations: every fit converged</a:t>
+              <a:t>LR: E4, C = 0.3; all fits converged</a:t>
             </a:r>
           </a:p>
         </p:txBody>
@@ -16394,7 +16993,7 @@
                 </a:solidFill>
                 <a:latin typeface="Calibri"/>
               </a:rPr>
-              <a:t>Random state 42 everywhere. Experiments: E0 majority baseline → E1 structure → E2 + region → E3 + geo target encoding → E4 + engineered features → E5 class-balanced → E6 ordinal.</a:t>
+              <a:t>Random state 42 everywhere. Model 1 experiments: E0 baseline → E1 structure → E2 + region → E3 + geo target encoding → E4 + engineered → E5 balanced → E6 ordinal. Models 2–3 reuse the E4 features.</a:t>
             </a:r>
           </a:p>
         </p:txBody>
@@ -16429,7 +17028,7 @@
                 </a:solidFill>
                 <a:latin typeface="Calibri"/>
               </a:rPr>
-              <a:t>Group [XX]  ·  Earthquake damage prediction with logistic regression</a:t>
+              <a:t>Group [XX]  ·  Earthquake damage prediction: logistic regression, random forest, gradient boosting</a:t>
             </a:r>
           </a:p>
         </p:txBody>
